--- a/slides/5-spot-workshop.pptx
+++ b/slides/5-spot-workshop.pptx
@@ -4,6 +4,9 @@
   <p:sldMasterIdLst>
     <p:sldMasterId id="2147483648" r:id="rId1"/>
   </p:sldMasterIdLst>
+  <p:notesMasterIdLst>
+    <p:notesMasterId r:id="rId16"/>
+  </p:notesMasterIdLst>
   <p:sldIdLst>
     <p:sldId id="256" r:id="rId2"/>
     <p:sldId id="257" r:id="rId3"/>
@@ -20,10 +23,7 @@
     <p:sldId id="268" r:id="rId14"/>
     <p:sldId id="269" r:id="rId15"/>
   </p:sldIdLst>
-  <p:notesMasterIdLst>
-    <p:notesMasterId r:id="rId16"/>
-  </p:notesMasterIdLst>
-  <p:sldSz cx="9144000" cy="5143500"/>
+  <p:sldSz cx="9144000" cy="5143500" type="screen16x9"/>
   <p:notesSz cx="5143500" cy="9144000"/>
   <p:defaultTextStyle>
     <a:lvl1pPr marL="0" algn="l" defTabSz="914400" rtl="0" eaLnBrk="1" latinLnBrk="0" hangingPunct="1">
@@ -117,6 +117,11 @@
       </a:defRPr>
     </a:lvl9pPr>
   </p:defaultTextStyle>
+  <p:extLst>
+    <p:ext uri="{EFAFB233-063F-42B5-8137-9DF3F51BA10A}">
+      <p15:sldGuideLst xmlns:p15="http://schemas.microsoft.com/office/powerpoint/2012/main"/>
+    </p:ext>
+  </p:extLst>
 </p:presentation>
 </file>
 
@@ -142,234 +147,10 @@
           <a:chExt cx="0" cy="0"/>
         </a:xfrm>
       </p:grpSpPr>
-      <p:sp>
-        <p:nvSpPr>
-          <p:cNvPr id="2" name="Header Placeholder 1"/>
-          <p:cNvSpPr>
-            <a:spLocks noGrp="1"/>
-          </p:cNvSpPr>
-          <p:nvPr>
-            <p:ph type="hdr" sz="quarter"/>
-          </p:nvPr>
-        </p:nvSpPr>
-        <p:spPr>
-          <a:xfrm>
-            <a:off x="0" y="0"/>
-            <a:ext cx="2971800" cy="458788"/>
-          </a:xfrm>
-          <a:prstGeom prst="rect">
-            <a:avLst/>
-          </a:prstGeom>
-        </p:spPr>
-        <p:txBody>
-          <a:bodyPr vert="horz" lIns="91440" tIns="45720" rIns="91440" bIns="45720" rtlCol="0"/>
-          <a:lstStyle>
-            <a:lvl1pPr algn="l">
-              <a:defRPr sz="1200"/>
-            </a:lvl1pPr>
-          </a:lstStyle>
-          <a:p>
-            <a:endParaRPr lang="en-US"/>
-          </a:p>
-        </p:txBody>
-      </p:sp>
-      <p:sp>
-        <p:nvSpPr>
-          <p:cNvPr id="3" name="Date Placeholder 2"/>
-          <p:cNvSpPr>
-            <a:spLocks noGrp="1"/>
-          </p:cNvSpPr>
-          <p:nvPr>
-            <p:ph type="dt" idx="1"/>
-          </p:nvPr>
-        </p:nvSpPr>
-        <p:spPr>
-          <a:xfrm>
-            <a:off x="3884613" y="0"/>
-            <a:ext cx="2971800" cy="458788"/>
-          </a:xfrm>
-          <a:prstGeom prst="rect">
-            <a:avLst/>
-          </a:prstGeom>
-        </p:spPr>
-        <p:txBody>
-          <a:bodyPr vert="horz" lIns="91440" tIns="45720" rIns="91440" bIns="45720" rtlCol="0"/>
-          <a:lstStyle>
-            <a:lvl1pPr algn="r">
-              <a:defRPr sz="1200"/>
-            </a:lvl1pPr>
-          </a:lstStyle>
-          <a:p>
-            <a:fld id="{5282F153-3F37-0F45-9E97-73ACFA13230C}" type="datetimeFigureOut">
-              <a:rPr lang="en-US"/>
-              <a:t>7/23/19</a:t>
-            </a:fld>
-            <a:endParaRPr lang="en-US"/>
-          </a:p>
-        </p:txBody>
-      </p:sp>
-      <p:sp>
-        <p:nvSpPr>
-          <p:cNvPr id="4" name="Slide Image Placeholder 3"/>
-          <p:cNvSpPr>
-            <a:spLocks noGrp="1" noRot="1" noChangeAspect="1"/>
-          </p:cNvSpPr>
-          <p:nvPr>
-            <p:ph type="sldImg" idx="2"/>
-          </p:nvPr>
-        </p:nvSpPr>
-        <p:spPr>
-          <a:xfrm>
-            <a:off x="685800" y="1143000"/>
-            <a:ext cx="5486400" cy="3086100"/>
-          </a:xfrm>
-          <a:prstGeom prst="rect">
-            <a:avLst/>
-          </a:prstGeom>
-          <a:noFill/>
-          <a:ln w="12700">
-            <a:solidFill>
-              <a:prstClr val="black"/>
-            </a:solidFill>
-          </a:ln>
-        </p:spPr>
-        <p:txBody>
-          <a:bodyPr vert="horz" lIns="91440" tIns="45720" rIns="91440" bIns="45720" rtlCol="0" anchor="ctr"/>
-          <a:lstStyle/>
-          <a:p>
-            <a:endParaRPr lang="en-US"/>
-          </a:p>
-        </p:txBody>
-      </p:sp>
-      <p:sp>
-        <p:nvSpPr>
-          <p:cNvPr id="5" name="Notes Placeholder 4"/>
-          <p:cNvSpPr>
-            <a:spLocks noGrp="1"/>
-          </p:cNvSpPr>
-          <p:nvPr>
-            <p:ph type="body" sz="quarter" idx="3"/>
-          </p:nvPr>
-        </p:nvSpPr>
-        <p:spPr>
-          <a:xfrm>
-            <a:off x="685800" y="4400550"/>
-            <a:ext cx="5486400" cy="3600450"/>
-          </a:xfrm>
-          <a:prstGeom prst="rect">
-            <a:avLst/>
-          </a:prstGeom>
-        </p:spPr>
-        <p:txBody>
-          <a:bodyPr vert="horz" lIns="91440" tIns="45720" rIns="91440" bIns="45720" rtlCol="0"/>
-          <a:lstStyle/>
-          <a:p>
-            <a:pPr lvl="0"/>
-            <a:r>
-              <a:rPr lang="en-US"/>
-              <a:t>Click to edit Master text styles</a:t>
-            </a:r>
-          </a:p>
-          <a:p>
-            <a:pPr lvl="1"/>
-            <a:r>
-              <a:rPr lang="en-US"/>
-              <a:t>Second level</a:t>
-            </a:r>
-          </a:p>
-          <a:p>
-            <a:pPr lvl="2"/>
-            <a:r>
-              <a:rPr lang="en-US"/>
-              <a:t>Third level</a:t>
-            </a:r>
-          </a:p>
-          <a:p>
-            <a:pPr lvl="3"/>
-            <a:r>
-              <a:rPr lang="en-US"/>
-              <a:t>Fourth level</a:t>
-            </a:r>
-          </a:p>
-          <a:p>
-            <a:pPr lvl="4"/>
-            <a:r>
-              <a:rPr lang="en-US"/>
-              <a:t>Fifth level</a:t>
-            </a:r>
-          </a:p>
-        </p:txBody>
-      </p:sp>
-      <p:sp>
-        <p:nvSpPr>
-          <p:cNvPr id="6" name="Footer Placeholder 5"/>
-          <p:cNvSpPr>
-            <a:spLocks noGrp="1"/>
-          </p:cNvSpPr>
-          <p:nvPr>
-            <p:ph type="ftr" sz="quarter" idx="4"/>
-          </p:nvPr>
-        </p:nvSpPr>
-        <p:spPr>
-          <a:xfrm>
-            <a:off x="0" y="8685213"/>
-            <a:ext cx="2971800" cy="458787"/>
-          </a:xfrm>
-          <a:prstGeom prst="rect">
-            <a:avLst/>
-          </a:prstGeom>
-        </p:spPr>
-        <p:txBody>
-          <a:bodyPr vert="horz" lIns="91440" tIns="45720" rIns="91440" bIns="45720" rtlCol="0" anchor="b"/>
-          <a:lstStyle>
-            <a:lvl1pPr algn="l">
-              <a:defRPr sz="1200"/>
-            </a:lvl1pPr>
-          </a:lstStyle>
-          <a:p>
-            <a:endParaRPr lang="en-US"/>
-          </a:p>
-        </p:txBody>
-      </p:sp>
-      <p:sp>
-        <p:nvSpPr>
-          <p:cNvPr id="7" name="Slide Number Placeholder 6"/>
-          <p:cNvSpPr>
-            <a:spLocks noGrp="1"/>
-          </p:cNvSpPr>
-          <p:nvPr>
-            <p:ph type="sldNum" sz="quarter" idx="5"/>
-          </p:nvPr>
-        </p:nvSpPr>
-        <p:spPr>
-          <a:xfrm>
-            <a:off x="3884613" y="8685213"/>
-            <a:ext cx="2971800" cy="458787"/>
-          </a:xfrm>
-          <a:prstGeom prst="rect">
-            <a:avLst/>
-          </a:prstGeom>
-        </p:spPr>
-        <p:txBody>
-          <a:bodyPr vert="horz" lIns="91440" tIns="45720" rIns="91440" bIns="45720" rtlCol="0" anchor="b"/>
-          <a:lstStyle>
-            <a:lvl1pPr algn="r">
-              <a:defRPr sz="1200"/>
-            </a:lvl1pPr>
-          </a:lstStyle>
-          <a:p>
-            <a:fld id="{CE5E9CC1-C706-0F49-92D6-E571CC5EEA8F}" type="slidenum">
-              <a:rPr lang="en-US"/>
-              <a:t>‹#›</a:t>
-            </a:fld>
-            <a:endParaRPr lang="en-US"/>
-          </a:p>
-        </p:txBody>
-      </p:sp>
     </p:spTree>
     <p:extLst>
       <p:ext uri="{BB962C8B-B14F-4D97-AF65-F5344CB8AC3E}">
-        <p14:creationId xmlns:p14="http://schemas.microsoft.com/office/powerpoint/2010/main" val="1024086991"/>
+        <p14:creationId xmlns:p14="http://schemas.microsoft.com/office/powerpoint/2010/main" val="369538372"/>
       </p:ext>
     </p:extLst>
   </p:cSld>
@@ -517,7 +298,6 @@
               <a:rPr lang="en-US" dirty="0"/>
               <a:t>Welcome. Today is hands-on: a capture-the-flag built directly on 5-Spot. 2.5–3 hours of lab time, breaks and Q&amp;A around it. Everything you need is in the 5-spot-workshop repo; slides are just the map.</a:t>
             </a:r>
-            <a:endParaRPr lang="en-US" dirty="0"/>
           </a:p>
         </p:txBody>
       </p:sp>
@@ -605,7 +385,6 @@
               <a:rPr lang="en-US" dirty="0"/>
               <a:t>The negative test matters as much as the positive one — show the Pending pod first. nodeTaints comes straight from the ScheduledMachine spec, so the policy is declared next to the schedule, in Git, auditable.</a:t>
             </a:r>
-            <a:endParaRPr lang="en-US" dirty="0"/>
           </a:p>
         </p:txBody>
       </p:sp>
@@ -693,7 +472,6 @@
               <a:rPr lang="en-US" dirty="0"/>
               <a:t>This is the product's whole thesis: removal is graceful, bounded, observable. Have teams watch both panes — the SM phase on the management cluster and nodes/pods on the workload cluster. The kill switch demo gets the best reactions; do it live at the front if energy dips.</a:t>
             </a:r>
-            <a:endParaRPr lang="en-US" dirty="0"/>
           </a:p>
         </p:txBody>
       </p:sp>
@@ -781,7 +559,6 @@
               <a:rPr lang="en-US" dirty="0"/>
               <a:t>Pitch the bonuses honestly: Flux is reachable for most; CoCo is a true stretch with hardware prerequisites, k0smotron track only. The closing line is the message to take back to your risk committee.</a:t>
             </a:r>
-            <a:endParaRPr lang="en-US" dirty="0"/>
           </a:p>
         </p:txBody>
       </p:sp>
@@ -869,7 +646,6 @@
               <a:rPr lang="en-US" dirty="0"/>
               <a:t>Keep this slide up during the first lab block. Repeat the help ladder verbally — senior crowds under-ask.</a:t>
             </a:r>
-            <a:endParaRPr lang="en-US" dirty="0"/>
           </a:p>
         </p:txBody>
       </p:sp>
@@ -957,7 +733,6 @@
               <a:rPr lang="en-US" dirty="0"/>
               <a:t>Close with the contribution ask — this audience is exactly who should be filing issues against an incubating project. Swap in the real workshop repo URL before presenting.</a:t>
             </a:r>
-            <a:endParaRPr lang="en-US" dirty="0"/>
           </a:p>
         </p:txBody>
       </p:sp>
@@ -1045,7 +820,6 @@
               <a:rPr lang="en-US" dirty="0"/>
               <a:t>The economic setup. Regulated shops can't just autoscale into public spot markets, so capacity runs around the clock for workloads that live in windows. The waste is structural, and manual reclaim has no audit trail.</a:t>
             </a:r>
-            <a:endParaRPr lang="en-US" dirty="0"/>
           </a:p>
         </p:txBody>
       </p:sp>
@@ -1133,7 +907,6 @@
               <a:rPr lang="en-US" dirty="0"/>
               <a:t>Mechanics in one picture. You declare a ScheduledMachine; the controller expands it into the bootstrap config, the infrastructure machine, and the CAPI Machine, and reconciles every ~60 seconds. Provider-agnostic: today you'll see both DockerMachine and RemoteMachine behind the same spec.</a:t>
             </a:r>
-            <a:endParaRPr lang="en-US" dirty="0"/>
           </a:p>
         </p:txBody>
       </p:sp>
@@ -1221,7 +994,6 @@
               <a:rPr lang="en-US" dirty="0"/>
               <a:t>Four phases plus two side states (Disabled, Terminated, Error). Flag 3 is literally driving this state machine: disable the schedule, watch ShuttingDown respect gracefulShutdownTimeout and nodeDrainTimeout, land in Inactive. Full diagram: 5spot.finos.org machine-lifecycle.</a:t>
             </a:r>
-            <a:endParaRPr lang="en-US" dirty="0"/>
           </a:p>
         </p:txBody>
       </p:sp>
@@ -1309,7 +1081,6 @@
               <a:rPr lang="en-US" dirty="0"/>
               <a:t>Set expectations: minimal slides, maximal terminal. Timing is elastic — fast teams hit the double-star bonus; everyone should land Flag 3. Teams or solo both fine; leaderboard is social glue, not a grade.</a:t>
             </a:r>
-            <a:endParaRPr lang="en-US" dirty="0"/>
           </a:p>
         </p:txBody>
       </p:sp>
@@ -1397,7 +1168,6 @@
               <a:rPr lang="en-US" dirty="0"/>
               <a:t>Be candid that CAPD is a shortcut — the intro page says so in bold. The k0smotron track is the production-representative one; it's also heavier, which is why both exist. Many will do green first, blue second.</a:t>
             </a:r>
-            <a:endParaRPr lang="en-US" dirty="0"/>
           </a:p>
         </p:txBody>
       </p:sp>
@@ -1485,7 +1255,6 @@
               <a:rPr lang="en-US" dirty="0"/>
               <a:t>Per-OS guidance: Mac → Colima (setup-mac.sh installs everything including Colima itself); Windows → Codespaces or Killercoda, don't fight WSL nested virt; Linux → anything, and it's the best host for the Confidential Containers bonus. The bootstrap script is idempotent and has --check-only.</a:t>
             </a:r>
-            <a:endParaRPr lang="en-US" dirty="0"/>
           </a:p>
         </p:txBody>
       </p:sp>
@@ -1573,7 +1342,6 @@
               <a:rPr lang="en-US" dirty="0"/>
               <a:t>Flags 1–3 are the spine — everyone should capture them. The bonuses are stretch by design: Flux needs the repo public; CoCo needs nested virt on the worker host, so it's realistically a local-Linux flex. Verifiers print hints on failure — failing CHECK is a feature.</a:t>
             </a:r>
-            <a:endParaRPr lang="en-US" dirty="0"/>
           </a:p>
         </p:txBody>
       </p:sp>
@@ -1661,7 +1429,6 @@
               <a:rPr lang="en-US" dirty="0"/>
               <a:t>Common stalls: clusterctl not on the v1.9 line (the v1beta1 footgun), or on the k0smotron track an SSH/key issue between the management cluster and the target host — the verifier hints cover both. Remind people about the ~60s reconcile tick.</a:t>
             </a:r>
-            <a:endParaRPr lang="en-US" dirty="0"/>
           </a:p>
         </p:txBody>
       </p:sp>
@@ -1734,6 +1501,11 @@
 <file path=ppt/slideMasters/slideMaster1.xml><?xml version="1.0" encoding="utf-8"?>
 <p:sldMaster xmlns:a="http://schemas.openxmlformats.org/drawingml/2006/main" xmlns:r="http://schemas.openxmlformats.org/officeDocument/2006/relationships" xmlns:p="http://schemas.openxmlformats.org/presentationml/2006/main">
   <p:cSld>
+    <p:bg>
+      <p:bgRef idx="1001">
+        <a:schemeClr val="bg1"/>
+      </p:bgRef>
+    </p:bg>
     <p:spTree>
       <p:nvGrpSpPr>
         <p:cNvPr id="1" name=""/>
@@ -2016,6 +1788,7 @@
         <a:solidFill>
           <a:srgbClr val="1E2761"/>
         </a:solidFill>
+        <a:effectLst/>
       </p:bgPr>
     </p:bg>
     <p:spTree>
@@ -2034,14 +1807,14 @@
       </p:grpSpPr>
       <p:pic>
         <p:nvPicPr>
-          <p:cNvPr id="2" name="Image 0" descr="preencoded.png">    </p:cNvPr>
+          <p:cNvPr id="2" name="Image 0" descr="preencoded.png"/>
           <p:cNvPicPr>
             <a:picLocks noChangeAspect="1"/>
           </p:cNvPicPr>
           <p:nvPr/>
         </p:nvPicPr>
         <p:blipFill>
-          <a:blip r:embed="rId1"/>
+          <a:blip r:embed="rId3"/>
           <a:stretch>
             <a:fillRect/>
           </a:stretch>
@@ -2077,11 +1850,11 @@
           <a:bodyPr wrap="square" lIns="0" tIns="0" rIns="0" bIns="0" rtlCol="0" anchor="ctr"/>
           <a:lstStyle/>
           <a:p>
-            <a:pPr indent="0" marL="0">
-              <a:buNone/>
-            </a:pPr>
-            <a:r>
-              <a:rPr lang="en-US" sz="4100" b="1" spc="200" kern="0" dirty="0">
+            <a:pPr marL="0" indent="0">
+              <a:buNone/>
+            </a:pPr>
+            <a:r>
+              <a:rPr lang="en-US" sz="4100" b="1" kern="0" spc="200" dirty="0">
                 <a:solidFill>
                   <a:srgbClr val="FFFFFF"/>
                 </a:solidFill>
@@ -2116,7 +1889,7 @@
           <a:bodyPr wrap="square" lIns="0" tIns="0" rIns="0" bIns="0" rtlCol="0" anchor="ctr"/>
           <a:lstStyle/>
           <a:p>
-            <a:pPr indent="0" marL="0">
+            <a:pPr marL="0" indent="0">
               <a:buNone/>
             </a:pPr>
             <a:r>
@@ -2155,7 +1928,7 @@
           <a:bodyPr wrap="square" lIns="0" tIns="0" rIns="0" bIns="0" rtlCol="0" anchor="ctr"/>
           <a:lstStyle/>
           <a:p>
-            <a:pPr indent="0" marL="0">
+            <a:pPr marL="0" indent="0">
               <a:buNone/>
             </a:pPr>
             <a:r>
@@ -2172,7 +1945,7 @@
             <a:endParaRPr lang="en-US" sz="1300" dirty="0"/>
           </a:p>
           <a:p>
-            <a:pPr indent="0" marL="0">
+            <a:pPr marL="0" indent="0">
               <a:buNone/>
             </a:pPr>
             <a:r>
@@ -2211,7 +1984,7 @@
           <a:bodyPr wrap="square" lIns="0" tIns="0" rIns="0" bIns="0" rtlCol="0" anchor="ctr"/>
           <a:lstStyle/>
           <a:p>
-            <a:pPr indent="0" marL="0">
+            <a:pPr marL="0" indent="0">
               <a:buNone/>
             </a:pPr>
             <a:r>
@@ -2245,6 +2018,7 @@
         <a:solidFill>
           <a:srgbClr val="FFFFFF"/>
         </a:solidFill>
+        <a:effectLst/>
       </p:bgPr>
     </p:bg>
     <p:spTree>
@@ -2282,7 +2056,7 @@
           <a:bodyPr wrap="square" lIns="0" tIns="0" rIns="0" bIns="0" rtlCol="0" anchor="ctr"/>
           <a:lstStyle/>
           <a:p>
-            <a:pPr indent="0" marL="0">
+            <a:pPr marL="0" indent="0">
               <a:buNone/>
             </a:pPr>
             <a:r>
@@ -2321,7 +2095,7 @@
           <a:bodyPr wrap="square" lIns="0" tIns="0" rIns="0" bIns="0" rtlCol="0" anchor="ctr"/>
           <a:lstStyle/>
           <a:p>
-            <a:pPr indent="0" marL="0">
+            <a:pPr marL="0" indent="0">
               <a:buNone/>
             </a:pPr>
             <a:r>
@@ -2360,6 +2134,13 @@
           </a:solidFill>
           <a:ln/>
         </p:spPr>
+        <p:txBody>
+          <a:bodyPr/>
+          <a:lstStyle/>
+          <a:p>
+            <a:endParaRPr lang="en-US"/>
+          </a:p>
+        </p:txBody>
       </p:sp>
       <p:sp>
         <p:nvSpPr>
@@ -2382,7 +2163,7 @@
           <a:bodyPr wrap="square" lIns="0" tIns="0" rIns="0" bIns="0" rtlCol="0" anchor="ctr"/>
           <a:lstStyle/>
           <a:p>
-            <a:pPr indent="0" marL="0">
+            <a:pPr marL="0" indent="0">
               <a:buNone/>
             </a:pPr>
             <a:r>
@@ -2421,7 +2202,7 @@
           <a:bodyPr wrap="square" lIns="0" tIns="0" rIns="0" bIns="0" rtlCol="0" anchor="ctr"/>
           <a:lstStyle/>
           <a:p>
-            <a:pPr indent="0" marL="0">
+            <a:pPr marL="0" indent="0">
               <a:buNone/>
             </a:pPr>
             <a:r>
@@ -2438,7 +2219,7 @@
             <a:endParaRPr lang="en-US" sz="1150" dirty="0"/>
           </a:p>
           <a:p>
-            <a:pPr indent="0" marL="0">
+            <a:pPr marL="0" indent="0">
               <a:buNone/>
             </a:pPr>
             <a:r>
@@ -2477,6 +2258,13 @@
           </a:solidFill>
           <a:ln/>
         </p:spPr>
+        <p:txBody>
+          <a:bodyPr/>
+          <a:lstStyle/>
+          <a:p>
+            <a:endParaRPr lang="en-US"/>
+          </a:p>
+        </p:txBody>
       </p:sp>
       <p:sp>
         <p:nvSpPr>
@@ -2499,7 +2287,7 @@
           <a:bodyPr wrap="square" lIns="0" tIns="0" rIns="0" bIns="0" rtlCol="0" anchor="ctr"/>
           <a:lstStyle/>
           <a:p>
-            <a:pPr indent="0" marL="0">
+            <a:pPr marL="0" indent="0">
               <a:buNone/>
             </a:pPr>
             <a:r>
@@ -2538,7 +2326,7 @@
           <a:bodyPr wrap="square" lIns="0" tIns="0" rIns="0" bIns="0" rtlCol="0" anchor="ctr"/>
           <a:lstStyle/>
           <a:p>
-            <a:pPr indent="0" marL="0">
+            <a:pPr marL="0" indent="0">
               <a:buNone/>
             </a:pPr>
             <a:r>
@@ -2555,7 +2343,7 @@
             <a:endParaRPr lang="en-US" sz="1150" dirty="0"/>
           </a:p>
           <a:p>
-            <a:pPr indent="0" marL="0">
+            <a:pPr marL="0" indent="0">
               <a:buNone/>
             </a:pPr>
             <a:r>
@@ -2594,6 +2382,13 @@
           </a:solidFill>
           <a:ln/>
         </p:spPr>
+        <p:txBody>
+          <a:bodyPr/>
+          <a:lstStyle/>
+          <a:p>
+            <a:endParaRPr lang="en-US"/>
+          </a:p>
+        </p:txBody>
       </p:sp>
       <p:sp>
         <p:nvSpPr>
@@ -2616,7 +2411,7 @@
           <a:bodyPr wrap="square" lIns="0" tIns="0" rIns="0" bIns="0" rtlCol="0" anchor="ctr"/>
           <a:lstStyle/>
           <a:p>
-            <a:pPr indent="0" marL="0">
+            <a:pPr marL="0" indent="0">
               <a:buNone/>
             </a:pPr>
             <a:r>
@@ -2630,9 +2425,6 @@
               </a:rPr>
               <a:t>Why it matters:  </a:t>
             </a:r>
-            <a:pPr indent="0" marL="0">
-              <a:buNone/>
-            </a:pPr>
             <a:r>
               <a:rPr lang="en-US" sz="1300" dirty="0">
                 <a:solidFill>
@@ -2664,6 +2456,7 @@
         <a:solidFill>
           <a:srgbClr val="FFFFFF"/>
         </a:solidFill>
+        <a:effectLst/>
       </p:bgPr>
     </p:bg>
     <p:spTree>
@@ -2701,7 +2494,7 @@
           <a:bodyPr wrap="square" lIns="0" tIns="0" rIns="0" bIns="0" rtlCol="0" anchor="ctr"/>
           <a:lstStyle/>
           <a:p>
-            <a:pPr indent="0" marL="0">
+            <a:pPr marL="0" indent="0">
               <a:buNone/>
             </a:pPr>
             <a:r>
@@ -2740,13 +2533,20 @@
           </a:solidFill>
           <a:ln/>
           <a:effectLst>
-            <a:outerShdw sx="100000" sy="100000" kx="0" ky="0" algn="bl" rotWithShape="0" blurRad="76200" dist="25400" dir="2700000">
+            <a:outerShdw blurRad="76200" dist="25400" dir="2700000" algn="bl" rotWithShape="0">
               <a:srgbClr val="000000">
                 <a:alpha val="14000"/>
               </a:srgbClr>
             </a:outerShdw>
           </a:effectLst>
         </p:spPr>
+        <p:txBody>
+          <a:bodyPr/>
+          <a:lstStyle/>
+          <a:p>
+            <a:endParaRPr lang="en-US"/>
+          </a:p>
+        </p:txBody>
       </p:sp>
       <p:sp>
         <p:nvSpPr>
@@ -2769,7 +2569,7 @@
           <a:bodyPr wrap="square" lIns="0" tIns="0" rIns="0" bIns="0" rtlCol="0" anchor="ctr"/>
           <a:lstStyle/>
           <a:p>
-            <a:pPr indent="0" marL="0">
+            <a:pPr marL="0" indent="0">
               <a:buNone/>
             </a:pPr>
             <a:r>
@@ -2808,6 +2608,13 @@
           </a:solidFill>
           <a:ln/>
         </p:spPr>
+        <p:txBody>
+          <a:bodyPr/>
+          <a:lstStyle/>
+          <a:p>
+            <a:endParaRPr lang="en-US"/>
+          </a:p>
+        </p:txBody>
       </p:sp>
       <p:sp>
         <p:nvSpPr>
@@ -2830,7 +2637,7 @@
           <a:bodyPr wrap="square" lIns="0" tIns="0" rIns="0" bIns="0" rtlCol="0" anchor="ctr"/>
           <a:lstStyle/>
           <a:p>
-            <a:pPr algn="ctr" indent="0" marL="0">
+            <a:pPr marL="0" indent="0" algn="ctr">
               <a:buNone/>
             </a:pPr>
             <a:r>
@@ -2871,6 +2678,13 @@
             <a:tailEnd type="triangle"/>
           </a:ln>
         </p:spPr>
+        <p:txBody>
+          <a:bodyPr/>
+          <a:lstStyle/>
+          <a:p>
+            <a:endParaRPr lang="en-US"/>
+          </a:p>
+        </p:txBody>
       </p:sp>
       <p:sp>
         <p:nvSpPr>
@@ -2893,6 +2707,13 @@
           </a:solidFill>
           <a:ln/>
         </p:spPr>
+        <p:txBody>
+          <a:bodyPr/>
+          <a:lstStyle/>
+          <a:p>
+            <a:endParaRPr lang="en-US"/>
+          </a:p>
+        </p:txBody>
       </p:sp>
       <p:sp>
         <p:nvSpPr>
@@ -2915,7 +2736,7 @@
           <a:bodyPr wrap="square" lIns="0" tIns="0" rIns="0" bIns="0" rtlCol="0" anchor="ctr"/>
           <a:lstStyle/>
           <a:p>
-            <a:pPr algn="ctr" indent="0" marL="0">
+            <a:pPr marL="0" indent="0" algn="ctr">
               <a:buNone/>
             </a:pPr>
             <a:r>
@@ -2956,6 +2777,13 @@
             <a:tailEnd type="triangle"/>
           </a:ln>
         </p:spPr>
+        <p:txBody>
+          <a:bodyPr/>
+          <a:lstStyle/>
+          <a:p>
+            <a:endParaRPr lang="en-US"/>
+          </a:p>
+        </p:txBody>
       </p:sp>
       <p:sp>
         <p:nvSpPr>
@@ -2978,6 +2806,13 @@
           </a:solidFill>
           <a:ln/>
         </p:spPr>
+        <p:txBody>
+          <a:bodyPr/>
+          <a:lstStyle/>
+          <a:p>
+            <a:endParaRPr lang="en-US"/>
+          </a:p>
+        </p:txBody>
       </p:sp>
       <p:sp>
         <p:nvSpPr>
@@ -3000,7 +2835,7 @@
           <a:bodyPr wrap="square" lIns="0" tIns="0" rIns="0" bIns="0" rtlCol="0" anchor="ctr"/>
           <a:lstStyle/>
           <a:p>
-            <a:pPr algn="ctr" indent="0" marL="0">
+            <a:pPr marL="0" indent="0" algn="ctr">
               <a:buNone/>
             </a:pPr>
             <a:r>
@@ -3039,7 +2874,7 @@
           <a:bodyPr wrap="square" lIns="0" tIns="0" rIns="0" bIns="0" rtlCol="0" anchor="ctr"/>
           <a:lstStyle/>
           <a:p>
-            <a:pPr indent="0" marL="0">
+            <a:pPr marL="0" indent="0">
               <a:buNone/>
             </a:pPr>
             <a:r>
@@ -3053,9 +2888,6 @@
               </a:rPr>
               <a:t>Watch the node get cordoned, the workload get evicted gracefully (not killed), and the machine objects disappear — all inside </a:t>
             </a:r>
-            <a:pPr indent="0" marL="0">
-              <a:buNone/>
-            </a:pPr>
             <a:r>
               <a:rPr lang="en-US" sz="1350" b="1" dirty="0">
                 <a:solidFill>
@@ -3067,9 +2899,6 @@
               </a:rPr>
               <a:t>gracefulShutdownTimeout</a:t>
             </a:r>
-            <a:pPr indent="0" marL="0">
-              <a:buNone/>
-            </a:pPr>
             <a:r>
               <a:rPr lang="en-US" sz="1350" dirty="0">
                 <a:solidFill>
@@ -3106,6 +2935,13 @@
           </a:solidFill>
           <a:ln/>
         </p:spPr>
+        <p:txBody>
+          <a:bodyPr/>
+          <a:lstStyle/>
+          <a:p>
+            <a:endParaRPr lang="en-US"/>
+          </a:p>
+        </p:txBody>
       </p:sp>
       <p:sp>
         <p:nvSpPr>
@@ -3128,7 +2964,7 @@
           <a:bodyPr wrap="square" lIns="0" tIns="0" rIns="0" bIns="0" rtlCol="0" anchor="ctr"/>
           <a:lstStyle/>
           <a:p>
-            <a:pPr indent="0" marL="0">
+            <a:pPr marL="0" indent="0">
               <a:buNone/>
             </a:pPr>
             <a:r>
@@ -3142,9 +2978,6 @@
               </a:rPr>
               <a:t>The 2-minute drill:  </a:t>
             </a:r>
-            <a:pPr indent="0" marL="0">
-              <a:buNone/>
-            </a:pPr>
             <a:r>
               <a:rPr lang="en-US" sz="1300" dirty="0">
                 <a:solidFill>
@@ -3176,6 +3009,7 @@
         <a:solidFill>
           <a:srgbClr val="1E2761"/>
         </a:solidFill>
+        <a:effectLst/>
       </p:bgPr>
     </p:bg>
     <p:spTree>
@@ -3213,7 +3047,7 @@
           <a:bodyPr wrap="square" lIns="0" tIns="0" rIns="0" bIns="0" rtlCol="0" anchor="ctr"/>
           <a:lstStyle/>
           <a:p>
-            <a:pPr indent="0" marL="0">
+            <a:pPr marL="0" indent="0">
               <a:buNone/>
             </a:pPr>
             <a:r>
@@ -3225,7 +3059,7 @@
                 <a:ea typeface="Cambria" pitchFamily="34" charset="-122"/>
                 <a:cs typeface="Cambria" pitchFamily="34" charset="-120"/>
               </a:rPr>
-              <a:t>The bonuses — for the hungry</a:t>
+              <a:t>The bonuses, for the hungry</a:t>
             </a:r>
             <a:endParaRPr lang="en-US" sz="3000" dirty="0"/>
           </a:p>
@@ -3252,6 +3086,13 @@
           </a:solidFill>
           <a:ln/>
         </p:spPr>
+        <p:txBody>
+          <a:bodyPr/>
+          <a:lstStyle/>
+          <a:p>
+            <a:endParaRPr lang="en-US"/>
+          </a:p>
+        </p:txBody>
       </p:sp>
       <p:sp>
         <p:nvSpPr>
@@ -3272,17 +3113,24 @@
           </a:solidFill>
           <a:ln/>
         </p:spPr>
+        <p:txBody>
+          <a:bodyPr/>
+          <a:lstStyle/>
+          <a:p>
+            <a:endParaRPr lang="en-US"/>
+          </a:p>
+        </p:txBody>
       </p:sp>
       <p:pic>
         <p:nvPicPr>
-          <p:cNvPr id="5" name="Image 0" descr="preencoded.png">    </p:cNvPr>
+          <p:cNvPr id="5" name="Image 0" descr="preencoded.png"/>
           <p:cNvPicPr>
             <a:picLocks noChangeAspect="1"/>
           </p:cNvPicPr>
           <p:nvPr/>
         </p:nvPicPr>
         <p:blipFill>
-          <a:blip r:embed="rId1"/>
+          <a:blip r:embed="rId3"/>
           <a:stretch>
             <a:fillRect/>
           </a:stretch>
@@ -3318,7 +3166,7 @@
           <a:bodyPr wrap="square" lIns="0" tIns="0" rIns="0" bIns="0" rtlCol="0" anchor="ctr"/>
           <a:lstStyle/>
           <a:p>
-            <a:pPr indent="0" marL="0">
+            <a:pPr marL="0" indent="0">
               <a:buNone/>
             </a:pPr>
             <a:r>
@@ -3394,7 +3242,7 @@
                 <a:ea typeface="Calibri" pitchFamily="34" charset="-122"/>
                 <a:cs typeface="Calibri" pitchFamily="34" charset="-120"/>
               </a:rPr>
-              <a:t>Open/close the window by committing — auditable change control</a:t>
+              <a:t>Open/close the window by committing, auditable change control</a:t>
             </a:r>
             <a:endParaRPr lang="en-US" sz="1200" dirty="0"/>
           </a:p>
@@ -3421,6 +3269,13 @@
           </a:solidFill>
           <a:ln/>
         </p:spPr>
+        <p:txBody>
+          <a:bodyPr/>
+          <a:lstStyle/>
+          <a:p>
+            <a:endParaRPr lang="en-US"/>
+          </a:p>
+        </p:txBody>
       </p:sp>
       <p:sp>
         <p:nvSpPr>
@@ -3441,17 +3296,24 @@
           </a:solidFill>
           <a:ln/>
         </p:spPr>
+        <p:txBody>
+          <a:bodyPr/>
+          <a:lstStyle/>
+          <a:p>
+            <a:endParaRPr lang="en-US"/>
+          </a:p>
+        </p:txBody>
       </p:sp>
       <p:pic>
         <p:nvPicPr>
-          <p:cNvPr id="10" name="Image 1" descr="preencoded.png">    </p:cNvPr>
+          <p:cNvPr id="10" name="Image 1" descr="preencoded.png"/>
           <p:cNvPicPr>
             <a:picLocks noChangeAspect="1"/>
           </p:cNvPicPr>
           <p:nvPr/>
         </p:nvPicPr>
         <p:blipFill>
-          <a:blip r:embed="rId2"/>
+          <a:blip r:embed="rId4"/>
           <a:stretch>
             <a:fillRect/>
           </a:stretch>
@@ -3487,7 +3349,7 @@
           <a:bodyPr wrap="square" lIns="0" tIns="0" rIns="0" bIns="0" rtlCol="0" anchor="ctr"/>
           <a:lstStyle/>
           <a:p>
-            <a:pPr indent="0" marL="0">
+            <a:pPr marL="0" indent="0">
               <a:buNone/>
             </a:pPr>
             <a:r>
@@ -3590,7 +3452,7 @@
           <a:bodyPr wrap="square" lIns="0" tIns="0" rIns="0" bIns="0" rtlCol="0" anchor="ctr"/>
           <a:lstStyle/>
           <a:p>
-            <a:pPr algn="ctr" indent="0" marL="0">
+            <a:pPr marL="0" indent="0" algn="ctr">
               <a:buNone/>
             </a:pPr>
             <a:r>
@@ -3624,6 +3486,7 @@
         <a:solidFill>
           <a:srgbClr val="FFFFFF"/>
         </a:solidFill>
+        <a:effectLst/>
       </p:bgPr>
     </p:bg>
     <p:spTree>
@@ -3661,7 +3524,7 @@
           <a:bodyPr wrap="square" lIns="0" tIns="0" rIns="0" bIns="0" rtlCol="0" anchor="ctr"/>
           <a:lstStyle/>
           <a:p>
-            <a:pPr indent="0" marL="0">
+            <a:pPr marL="0" indent="0">
               <a:buNone/>
             </a:pPr>
             <a:r>
@@ -3698,204 +3561,17 @@
           </a:solidFill>
           <a:ln/>
         </p:spPr>
+        <p:txBody>
+          <a:bodyPr/>
+          <a:lstStyle/>
+          <a:p>
+            <a:endParaRPr lang="en-US"/>
+          </a:p>
+        </p:txBody>
       </p:sp>
       <p:pic>
         <p:nvPicPr>
-          <p:cNvPr id="4" name="Image 0" descr="preencoded.png">    </p:cNvPr>
-          <p:cNvPicPr>
-            <a:picLocks noChangeAspect="1"/>
-          </p:cNvPicPr>
-          <p:nvPr/>
-        </p:nvPicPr>
-        <p:blipFill>
-          <a:blip r:embed="rId1"/>
-          <a:stretch>
-            <a:fillRect/>
-          </a:stretch>
-        </p:blipFill>
-        <p:spPr>
-          <a:xfrm>
-            <a:off x="630936" y="1298448"/>
-            <a:ext cx="310896" cy="310896"/>
-          </a:xfrm>
-          <a:prstGeom prst="rect">
-            <a:avLst/>
-          </a:prstGeom>
-        </p:spPr>
-      </p:pic>
-      <p:sp>
-        <p:nvSpPr>
-          <p:cNvPr id="5" name="Text 2"/>
-          <p:cNvSpPr/>
-          <p:nvPr/>
-        </p:nvSpPr>
-        <p:spPr>
-          <a:xfrm>
-            <a:off x="1280160" y="1097280"/>
-            <a:ext cx="7406640" cy="731520"/>
-          </a:xfrm>
-          <a:prstGeom prst="rect">
-            <a:avLst/>
-          </a:prstGeom>
-          <a:noFill/>
-          <a:ln/>
-        </p:spPr>
-        <p:txBody>
-          <a:bodyPr wrap="square" lIns="0" tIns="0" rIns="0" bIns="0" rtlCol="0" anchor="ctr"/>
-          <a:lstStyle/>
-          <a:p>
-            <a:pPr indent="0" marL="0">
-              <a:buNone/>
-            </a:pPr>
-            <a:r>
-              <a:rPr lang="en-US" sz="1450" b="1" dirty="0">
-                <a:solidFill>
-                  <a:srgbClr val="1E2761"/>
-                </a:solidFill>
-                <a:latin typeface="Calibri" pitchFamily="34" charset="0"/>
-                <a:ea typeface="Calibri" pitchFamily="34" charset="-122"/>
-                <a:cs typeface="Calibri" pitchFamily="34" charset="-120"/>
-              </a:rPr>
-              <a:t>Teams or solo  —  </a:t>
-            </a:r>
-            <a:pPr indent="0" marL="0">
-              <a:buNone/>
-            </a:pPr>
-            <a:r>
-              <a:rPr lang="en-US" sz="1300" dirty="0">
-                <a:solidFill>
-                  <a:srgbClr val="1A1F36"/>
-                </a:solidFill>
-                <a:latin typeface="Calibri" pitchFamily="34" charset="0"/>
-                <a:ea typeface="Calibri" pitchFamily="34" charset="-122"/>
-                <a:cs typeface="Calibri" pitchFamily="34" charset="-120"/>
-              </a:rPr>
-              <a:t>Your call. Own sandbox each; pair up freely — seniors helping seniors is the point.</a:t>
-            </a:r>
-            <a:endParaRPr lang="en-US" sz="1450" dirty="0"/>
-          </a:p>
-        </p:txBody>
-      </p:sp>
-      <p:sp>
-        <p:nvSpPr>
-          <p:cNvPr id="6" name="Shape 3"/>
-          <p:cNvSpPr/>
-          <p:nvPr/>
-        </p:nvSpPr>
-        <p:spPr>
-          <a:xfrm>
-            <a:off x="502920" y="2057400"/>
-            <a:ext cx="566928" cy="566928"/>
-          </a:xfrm>
-          <a:prstGeom prst="ellipse">
-            <a:avLst/>
-          </a:prstGeom>
-          <a:solidFill>
-            <a:srgbClr val="EFF4FE"/>
-          </a:solidFill>
-          <a:ln/>
-        </p:spPr>
-      </p:sp>
-      <p:pic>
-        <p:nvPicPr>
-          <p:cNvPr id="7" name="Image 1" descr="preencoded.png">    </p:cNvPr>
-          <p:cNvPicPr>
-            <a:picLocks noChangeAspect="1"/>
-          </p:cNvPicPr>
-          <p:nvPr/>
-        </p:nvPicPr>
-        <p:blipFill>
-          <a:blip r:embed="rId2"/>
-          <a:stretch>
-            <a:fillRect/>
-          </a:stretch>
-        </p:blipFill>
-        <p:spPr>
-          <a:xfrm>
-            <a:off x="630936" y="2185416"/>
-            <a:ext cx="310896" cy="310896"/>
-          </a:xfrm>
-          <a:prstGeom prst="rect">
-            <a:avLst/>
-          </a:prstGeom>
-        </p:spPr>
-      </p:pic>
-      <p:sp>
-        <p:nvSpPr>
-          <p:cNvPr id="8" name="Text 4"/>
-          <p:cNvSpPr/>
-          <p:nvPr/>
-        </p:nvSpPr>
-        <p:spPr>
-          <a:xfrm>
-            <a:off x="1280160" y="1984248"/>
-            <a:ext cx="7406640" cy="731520"/>
-          </a:xfrm>
-          <a:prstGeom prst="rect">
-            <a:avLst/>
-          </a:prstGeom>
-          <a:noFill/>
-          <a:ln/>
-        </p:spPr>
-        <p:txBody>
-          <a:bodyPr wrap="square" lIns="0" tIns="0" rIns="0" bIns="0" rtlCol="0" anchor="ctr"/>
-          <a:lstStyle/>
-          <a:p>
-            <a:pPr indent="0" marL="0">
-              <a:buNone/>
-            </a:pPr>
-            <a:r>
-              <a:rPr lang="en-US" sz="1450" b="1" dirty="0">
-                <a:solidFill>
-                  <a:srgbClr val="1E2761"/>
-                </a:solidFill>
-                <a:latin typeface="Calibri" pitchFamily="34" charset="0"/>
-                <a:ea typeface="Calibri" pitchFamily="34" charset="-122"/>
-                <a:cs typeface="Calibri" pitchFamily="34" charset="-120"/>
-              </a:rPr>
-              <a:t>Leaderboard  —  </a:t>
-            </a:r>
-            <a:pPr indent="0" marL="0">
-              <a:buNone/>
-            </a:pPr>
-            <a:r>
-              <a:rPr lang="en-US" sz="1300" dirty="0">
-                <a:solidFill>
-                  <a:srgbClr val="1A1F36"/>
-                </a:solidFill>
-                <a:latin typeface="Calibri" pitchFamily="34" charset="0"/>
-                <a:ea typeface="Calibri" pitchFamily="34" charset="-122"/>
-                <a:cs typeface="Calibri" pitchFamily="34" charset="-120"/>
-              </a:rPr>
-              <a:t>Shout / paste your FLAG{…} when you capture it. Bragging rights only.</a:t>
-            </a:r>
-            <a:endParaRPr lang="en-US" sz="1450" dirty="0"/>
-          </a:p>
-        </p:txBody>
-      </p:sp>
-      <p:sp>
-        <p:nvSpPr>
-          <p:cNvPr id="9" name="Shape 5"/>
-          <p:cNvSpPr/>
-          <p:nvPr/>
-        </p:nvSpPr>
-        <p:spPr>
-          <a:xfrm>
-            <a:off x="502920" y="2944368"/>
-            <a:ext cx="566928" cy="566928"/>
-          </a:xfrm>
-          <a:prstGeom prst="ellipse">
-            <a:avLst/>
-          </a:prstGeom>
-          <a:solidFill>
-            <a:srgbClr val="EFF4FE"/>
-          </a:solidFill>
-          <a:ln/>
-        </p:spPr>
-      </p:sp>
-      <p:pic>
-        <p:nvPicPr>
-          <p:cNvPr id="10" name="Image 2" descr="preencoded.png">    </p:cNvPr>
+          <p:cNvPr id="4" name="Image 0" descr="preencoded.png"/>
           <p:cNvPicPr>
             <a:picLocks noChangeAspect="1"/>
           </p:cNvPicPr>
@@ -3909,7 +3585,7 @@
         </p:blipFill>
         <p:spPr>
           <a:xfrm>
-            <a:off x="630936" y="3072384"/>
+            <a:off x="630936" y="1298448"/>
             <a:ext cx="310896" cy="310896"/>
           </a:xfrm>
           <a:prstGeom prst="rect">
@@ -3919,13 +3595,13 @@
       </p:pic>
       <p:sp>
         <p:nvSpPr>
-          <p:cNvPr id="11" name="Text 6"/>
-          <p:cNvSpPr/>
-          <p:nvPr/>
-        </p:nvSpPr>
-        <p:spPr>
-          <a:xfrm>
-            <a:off x="1280160" y="2871216"/>
+          <p:cNvPr id="5" name="Text 2"/>
+          <p:cNvSpPr/>
+          <p:nvPr/>
+        </p:nvSpPr>
+        <p:spPr>
+          <a:xfrm>
+            <a:off x="1280160" y="1097280"/>
             <a:ext cx="7406640" cy="731520"/>
           </a:xfrm>
           <a:prstGeom prst="rect">
@@ -3938,7 +3614,7 @@
           <a:bodyPr wrap="square" lIns="0" tIns="0" rIns="0" bIns="0" rtlCol="0" anchor="ctr"/>
           <a:lstStyle/>
           <a:p>
-            <a:pPr indent="0" marL="0">
+            <a:pPr marL="0" indent="0">
               <a:buNone/>
             </a:pPr>
             <a:r>
@@ -3950,11 +3626,8 @@
                 <a:ea typeface="Calibri" pitchFamily="34" charset="-122"/>
                 <a:cs typeface="Calibri" pitchFamily="34" charset="-120"/>
               </a:rPr>
-              <a:t>Help ladder  —  </a:t>
-            </a:r>
-            <a:pPr indent="0" marL="0">
-              <a:buNone/>
-            </a:pPr>
+              <a:t>Teams or solo  —  </a:t>
+            </a:r>
             <a:r>
               <a:rPr lang="en-US" sz="1300" dirty="0">
                 <a:solidFill>
@@ -3964,7 +3637,7 @@
                 <a:ea typeface="Calibri" pitchFamily="34" charset="-122"/>
                 <a:cs typeface="Calibri" pitchFamily="34" charset="-120"/>
               </a:rPr>
-              <a:t>1) the hints a failing CHECK prints  2) 5spot.finos.org/operations/troubleshooting  3) your table  4) me.</a:t>
+              <a:t>Your call. Own sandbox each; pair up freely — seniors helping seniors is the point.</a:t>
             </a:r>
             <a:endParaRPr lang="en-US" sz="1450" dirty="0"/>
           </a:p>
@@ -3972,13 +3645,13 @@
       </p:sp>
       <p:sp>
         <p:nvSpPr>
-          <p:cNvPr id="12" name="Shape 7"/>
-          <p:cNvSpPr/>
-          <p:nvPr/>
-        </p:nvSpPr>
-        <p:spPr>
-          <a:xfrm>
-            <a:off x="502920" y="3831336"/>
+          <p:cNvPr id="6" name="Shape 3"/>
+          <p:cNvSpPr/>
+          <p:nvPr/>
+        </p:nvSpPr>
+        <p:spPr>
+          <a:xfrm>
+            <a:off x="502920" y="2057400"/>
             <a:ext cx="566928" cy="566928"/>
           </a:xfrm>
           <a:prstGeom prst="ellipse">
@@ -3989,10 +3662,17 @@
           </a:solidFill>
           <a:ln/>
         </p:spPr>
+        <p:txBody>
+          <a:bodyPr/>
+          <a:lstStyle/>
+          <a:p>
+            <a:endParaRPr lang="en-US"/>
+          </a:p>
+        </p:txBody>
       </p:sp>
       <p:pic>
         <p:nvPicPr>
-          <p:cNvPr id="13" name="Image 3" descr="preencoded.png">    </p:cNvPr>
+          <p:cNvPr id="7" name="Image 1" descr="preencoded.png"/>
           <p:cNvPicPr>
             <a:picLocks noChangeAspect="1"/>
           </p:cNvPicPr>
@@ -4006,7 +3686,7 @@
         </p:blipFill>
         <p:spPr>
           <a:xfrm>
-            <a:off x="630936" y="3959352"/>
+            <a:off x="630936" y="2185416"/>
             <a:ext cx="310896" cy="310896"/>
           </a:xfrm>
           <a:prstGeom prst="rect">
@@ -4016,13 +3696,13 @@
       </p:pic>
       <p:sp>
         <p:nvSpPr>
-          <p:cNvPr id="14" name="Text 8"/>
-          <p:cNvSpPr/>
-          <p:nvPr/>
-        </p:nvSpPr>
-        <p:spPr>
-          <a:xfrm>
-            <a:off x="1280160" y="3758184"/>
+          <p:cNvPr id="8" name="Text 4"/>
+          <p:cNvSpPr/>
+          <p:nvPr/>
+        </p:nvSpPr>
+        <p:spPr>
+          <a:xfrm>
+            <a:off x="1280160" y="1984248"/>
             <a:ext cx="7406640" cy="731520"/>
           </a:xfrm>
           <a:prstGeom prst="rect">
@@ -4035,7 +3715,7 @@
           <a:bodyPr wrap="square" lIns="0" tIns="0" rIns="0" bIns="0" rtlCol="0" anchor="ctr"/>
           <a:lstStyle/>
           <a:p>
-            <a:pPr indent="0" marL="0">
+            <a:pPr marL="0" indent="0">
               <a:buNone/>
             </a:pPr>
             <a:r>
@@ -4047,11 +3727,210 @@
                 <a:ea typeface="Calibri" pitchFamily="34" charset="-122"/>
                 <a:cs typeface="Calibri" pitchFamily="34" charset="-120"/>
               </a:rPr>
+              <a:t>Leaderboard  —  </a:t>
+            </a:r>
+            <a:r>
+              <a:rPr lang="en-US" sz="1300" dirty="0">
+                <a:solidFill>
+                  <a:srgbClr val="1A1F36"/>
+                </a:solidFill>
+                <a:latin typeface="Calibri" pitchFamily="34" charset="0"/>
+                <a:ea typeface="Calibri" pitchFamily="34" charset="-122"/>
+                <a:cs typeface="Calibri" pitchFamily="34" charset="-120"/>
+              </a:rPr>
+              <a:t>Shout / paste your FLAG{…} when you capture it. Bragging rights only.</a:t>
+            </a:r>
+            <a:endParaRPr lang="en-US" sz="1450" dirty="0"/>
+          </a:p>
+        </p:txBody>
+      </p:sp>
+      <p:sp>
+        <p:nvSpPr>
+          <p:cNvPr id="9" name="Shape 5"/>
+          <p:cNvSpPr/>
+          <p:nvPr/>
+        </p:nvSpPr>
+        <p:spPr>
+          <a:xfrm>
+            <a:off x="502920" y="2944368"/>
+            <a:ext cx="566928" cy="566928"/>
+          </a:xfrm>
+          <a:prstGeom prst="ellipse">
+            <a:avLst/>
+          </a:prstGeom>
+          <a:solidFill>
+            <a:srgbClr val="EFF4FE"/>
+          </a:solidFill>
+          <a:ln/>
+        </p:spPr>
+        <p:txBody>
+          <a:bodyPr/>
+          <a:lstStyle/>
+          <a:p>
+            <a:endParaRPr lang="en-US"/>
+          </a:p>
+        </p:txBody>
+      </p:sp>
+      <p:pic>
+        <p:nvPicPr>
+          <p:cNvPr id="10" name="Image 2" descr="preencoded.png"/>
+          <p:cNvPicPr>
+            <a:picLocks noChangeAspect="1"/>
+          </p:cNvPicPr>
+          <p:nvPr/>
+        </p:nvPicPr>
+        <p:blipFill>
+          <a:blip r:embed="rId5"/>
+          <a:stretch>
+            <a:fillRect/>
+          </a:stretch>
+        </p:blipFill>
+        <p:spPr>
+          <a:xfrm>
+            <a:off x="630936" y="3072384"/>
+            <a:ext cx="310896" cy="310896"/>
+          </a:xfrm>
+          <a:prstGeom prst="rect">
+            <a:avLst/>
+          </a:prstGeom>
+        </p:spPr>
+      </p:pic>
+      <p:sp>
+        <p:nvSpPr>
+          <p:cNvPr id="11" name="Text 6"/>
+          <p:cNvSpPr/>
+          <p:nvPr/>
+        </p:nvSpPr>
+        <p:spPr>
+          <a:xfrm>
+            <a:off x="1280160" y="2871216"/>
+            <a:ext cx="7406640" cy="731520"/>
+          </a:xfrm>
+          <a:prstGeom prst="rect">
+            <a:avLst/>
+          </a:prstGeom>
+          <a:noFill/>
+          <a:ln/>
+        </p:spPr>
+        <p:txBody>
+          <a:bodyPr wrap="square" lIns="0" tIns="0" rIns="0" bIns="0" rtlCol="0" anchor="ctr"/>
+          <a:lstStyle/>
+          <a:p>
+            <a:pPr marL="0" indent="0">
+              <a:buNone/>
+            </a:pPr>
+            <a:r>
+              <a:rPr lang="en-US" sz="1450" b="1" dirty="0">
+                <a:solidFill>
+                  <a:srgbClr val="1E2761"/>
+                </a:solidFill>
+                <a:latin typeface="Calibri" pitchFamily="34" charset="0"/>
+                <a:ea typeface="Calibri" pitchFamily="34" charset="-122"/>
+                <a:cs typeface="Calibri" pitchFamily="34" charset="-120"/>
+              </a:rPr>
+              <a:t>Help ladder  —  </a:t>
+            </a:r>
+            <a:r>
+              <a:rPr lang="en-US" sz="1300" dirty="0">
+                <a:solidFill>
+                  <a:srgbClr val="1A1F36"/>
+                </a:solidFill>
+                <a:latin typeface="Calibri" pitchFamily="34" charset="0"/>
+                <a:ea typeface="Calibri" pitchFamily="34" charset="-122"/>
+                <a:cs typeface="Calibri" pitchFamily="34" charset="-120"/>
+              </a:rPr>
+              <a:t>1) the hints a failing CHECK prints  2) 5spot.finos.org/operations/troubleshooting  3) your table  4) me.</a:t>
+            </a:r>
+            <a:endParaRPr lang="en-US" sz="1450" dirty="0"/>
+          </a:p>
+        </p:txBody>
+      </p:sp>
+      <p:sp>
+        <p:nvSpPr>
+          <p:cNvPr id="12" name="Shape 7"/>
+          <p:cNvSpPr/>
+          <p:nvPr/>
+        </p:nvSpPr>
+        <p:spPr>
+          <a:xfrm>
+            <a:off x="502920" y="3831336"/>
+            <a:ext cx="566928" cy="566928"/>
+          </a:xfrm>
+          <a:prstGeom prst="ellipse">
+            <a:avLst/>
+          </a:prstGeom>
+          <a:solidFill>
+            <a:srgbClr val="EFF4FE"/>
+          </a:solidFill>
+          <a:ln/>
+        </p:spPr>
+        <p:txBody>
+          <a:bodyPr/>
+          <a:lstStyle/>
+          <a:p>
+            <a:endParaRPr lang="en-US"/>
+          </a:p>
+        </p:txBody>
+      </p:sp>
+      <p:pic>
+        <p:nvPicPr>
+          <p:cNvPr id="13" name="Image 3" descr="preencoded.png"/>
+          <p:cNvPicPr>
+            <a:picLocks noChangeAspect="1"/>
+          </p:cNvPicPr>
+          <p:nvPr/>
+        </p:nvPicPr>
+        <p:blipFill>
+          <a:blip r:embed="rId6"/>
+          <a:stretch>
+            <a:fillRect/>
+          </a:stretch>
+        </p:blipFill>
+        <p:spPr>
+          <a:xfrm>
+            <a:off x="630936" y="3959352"/>
+            <a:ext cx="310896" cy="310896"/>
+          </a:xfrm>
+          <a:prstGeom prst="rect">
+            <a:avLst/>
+          </a:prstGeom>
+        </p:spPr>
+      </p:pic>
+      <p:sp>
+        <p:nvSpPr>
+          <p:cNvPr id="14" name="Text 8"/>
+          <p:cNvSpPr/>
+          <p:nvPr/>
+        </p:nvSpPr>
+        <p:spPr>
+          <a:xfrm>
+            <a:off x="1280160" y="3758184"/>
+            <a:ext cx="7406640" cy="731520"/>
+          </a:xfrm>
+          <a:prstGeom prst="rect">
+            <a:avLst/>
+          </a:prstGeom>
+          <a:noFill/>
+          <a:ln/>
+        </p:spPr>
+        <p:txBody>
+          <a:bodyPr wrap="square" lIns="0" tIns="0" rIns="0" bIns="0" rtlCol="0" anchor="ctr"/>
+          <a:lstStyle/>
+          <a:p>
+            <a:pPr marL="0" indent="0">
+              <a:buNone/>
+            </a:pPr>
+            <a:r>
+              <a:rPr lang="en-US" sz="1450" b="1" dirty="0">
+                <a:solidFill>
+                  <a:srgbClr val="1E2761"/>
+                </a:solidFill>
+                <a:latin typeface="Calibri" pitchFamily="34" charset="0"/>
+                <a:ea typeface="Calibri" pitchFamily="34" charset="-122"/>
+                <a:cs typeface="Calibri" pitchFamily="34" charset="-120"/>
+              </a:rPr>
               <a:t>Can't break anything  —  </a:t>
             </a:r>
-            <a:pPr indent="0" marL="0">
-              <a:buNone/>
-            </a:pPr>
             <a:r>
               <a:rPr lang="en-US" sz="1300" dirty="0">
                 <a:solidFill>
@@ -4083,6 +3962,7 @@
         <a:solidFill>
           <a:srgbClr val="1E2761"/>
         </a:solidFill>
+        <a:effectLst/>
       </p:bgPr>
     </p:bg>
     <p:spTree>
@@ -4101,14 +3981,14 @@
       </p:grpSpPr>
       <p:pic>
         <p:nvPicPr>
-          <p:cNvPr id="2" name="Image 0" descr="preencoded.png">    </p:cNvPr>
+          <p:cNvPr id="2" name="Image 0" descr="preencoded.png"/>
           <p:cNvPicPr>
             <a:picLocks noChangeAspect="1"/>
           </p:cNvPicPr>
           <p:nvPr/>
         </p:nvPicPr>
         <p:blipFill>
-          <a:blip r:embed="rId1"/>
+          <a:blip r:embed="rId3"/>
           <a:stretch>
             <a:fillRect/>
           </a:stretch>
@@ -4144,7 +4024,7 @@
           <a:bodyPr wrap="square" lIns="0" tIns="0" rIns="0" bIns="0" rtlCol="0" anchor="ctr"/>
           <a:lstStyle/>
           <a:p>
-            <a:pPr indent="0" marL="0">
+            <a:pPr marL="0" indent="0">
               <a:buNone/>
             </a:pPr>
             <a:r>
@@ -4183,7 +4063,7 @@
           <a:bodyPr wrap="square" lIns="0" tIns="0" rIns="0" bIns="0" rtlCol="0" anchor="ctr"/>
           <a:lstStyle/>
           <a:p>
-            <a:pPr indent="0" marL="0">
+            <a:pPr marL="0" indent="0">
               <a:spcAft>
                 <a:spcPts val="1000"/>
               </a:spcAft>
@@ -4198,12 +4078,56 @@
                 <a:ea typeface="Calibri" pitchFamily="34" charset="-122"/>
                 <a:cs typeface="Calibri" pitchFamily="34" charset="-120"/>
               </a:rPr>
-              <a:t>Workshop repo + guides:  github.com/&lt;your-org&gt;/5-spot-workshop</a:t>
+              <a:t>Workshop repo + guides:  </a:t>
+            </a:r>
+            <a:r>
+              <a:rPr lang="en-US" sz="1450" dirty="0" err="1">
+                <a:solidFill>
+                  <a:srgbClr val="CADCFC"/>
+                </a:solidFill>
+                <a:latin typeface="Calibri" pitchFamily="34" charset="0"/>
+                <a:ea typeface="Calibri" pitchFamily="34" charset="-122"/>
+                <a:cs typeface="Calibri" pitchFamily="34" charset="-120"/>
+              </a:rPr>
+              <a:t>github.com</a:t>
+            </a:r>
+            <a:r>
+              <a:rPr lang="en-US" sz="1450" dirty="0">
+                <a:solidFill>
+                  <a:srgbClr val="CADCFC"/>
+                </a:solidFill>
+                <a:latin typeface="Calibri" pitchFamily="34" charset="0"/>
+                <a:ea typeface="Calibri" pitchFamily="34" charset="-122"/>
+                <a:cs typeface="Calibri" pitchFamily="34" charset="-120"/>
+              </a:rPr>
+              <a:t>/</a:t>
+            </a:r>
+            <a:r>
+              <a:rPr lang="en-US" sz="1450" dirty="0" err="1">
+                <a:solidFill>
+                  <a:srgbClr val="CADCFC"/>
+                </a:solidFill>
+                <a:latin typeface="Calibri" pitchFamily="34" charset="0"/>
+                <a:ea typeface="Calibri" pitchFamily="34" charset="-122"/>
+                <a:cs typeface="Calibri" pitchFamily="34" charset="-120"/>
+              </a:rPr>
+              <a:t>firestoned</a:t>
+            </a:r>
+            <a:r>
+              <a:rPr lang="en-US" sz="1450" dirty="0">
+                <a:solidFill>
+                  <a:srgbClr val="CADCFC"/>
+                </a:solidFill>
+                <a:latin typeface="Calibri" pitchFamily="34" charset="0"/>
+                <a:ea typeface="Calibri" pitchFamily="34" charset="-122"/>
+                <a:cs typeface="Calibri" pitchFamily="34" charset="-120"/>
+              </a:rPr>
+              <a:t>/5-spot-workshop</a:t>
             </a:r>
             <a:endParaRPr lang="en-US" sz="1450" dirty="0"/>
           </a:p>
           <a:p>
-            <a:pPr indent="0" marL="0">
+            <a:pPr marL="0" indent="0">
               <a:spcAft>
                 <a:spcPts val="1000"/>
               </a:spcAft>
@@ -4223,7 +4147,7 @@
             <a:endParaRPr lang="en-US" sz="1450" dirty="0"/>
           </a:p>
           <a:p>
-            <a:pPr indent="0" marL="0">
+            <a:pPr marL="0" indent="0">
               <a:spcAft>
                 <a:spcPts val="1000"/>
               </a:spcAft>
@@ -4243,7 +4167,7 @@
             <a:endParaRPr lang="en-US" sz="1450" dirty="0"/>
           </a:p>
           <a:p>
-            <a:pPr indent="0" marL="0">
+            <a:pPr marL="0" indent="0">
               <a:spcAft>
                 <a:spcPts val="1000"/>
               </a:spcAft>
@@ -4258,7 +4182,7 @@
                 <a:ea typeface="Calibri" pitchFamily="34" charset="-122"/>
                 <a:cs typeface="Calibri" pitchFamily="34" charset="-120"/>
               </a:rPr>
-              <a:t>Issues, PRs, and war stories welcome — it's an incubating FINOS project.</a:t>
+              <a:t>Issues, PRs, and war stories welcome, it's an incubating FINOS project.</a:t>
             </a:r>
             <a:endParaRPr lang="en-US" sz="1450" dirty="0"/>
           </a:p>
@@ -4285,7 +4209,7 @@
           <a:bodyPr wrap="square" lIns="0" tIns="0" rIns="0" bIns="0" rtlCol="0" anchor="ctr"/>
           <a:lstStyle/>
           <a:p>
-            <a:pPr indent="0" marL="0">
+            <a:pPr marL="0" indent="0">
               <a:buNone/>
             </a:pPr>
             <a:r>
@@ -4319,6 +4243,7 @@
         <a:solidFill>
           <a:srgbClr val="FFFFFF"/>
         </a:solidFill>
+        <a:effectLst/>
       </p:bgPr>
     </p:bg>
     <p:spTree>
@@ -4356,7 +4281,7 @@
           <a:bodyPr wrap="square" lIns="0" tIns="0" rIns="0" bIns="0" rtlCol="0" anchor="ctr"/>
           <a:lstStyle/>
           <a:p>
-            <a:pPr indent="0" marL="0">
+            <a:pPr marL="0" indent="0">
               <a:buNone/>
             </a:pPr>
             <a:r>
@@ -4395,24 +4320,31 @@
           </a:solidFill>
           <a:ln/>
           <a:effectLst>
-            <a:outerShdw sx="100000" sy="100000" kx="0" ky="0" algn="bl" rotWithShape="0" blurRad="76200" dist="25400" dir="2700000">
+            <a:outerShdw blurRad="76200" dist="25400" dir="2700000" algn="bl" rotWithShape="0">
               <a:srgbClr val="000000">
                 <a:alpha val="14000"/>
               </a:srgbClr>
             </a:outerShdw>
           </a:effectLst>
         </p:spPr>
+        <p:txBody>
+          <a:bodyPr/>
+          <a:lstStyle/>
+          <a:p>
+            <a:endParaRPr lang="en-US"/>
+          </a:p>
+        </p:txBody>
       </p:sp>
       <p:pic>
         <p:nvPicPr>
-          <p:cNvPr id="4" name="Image 0" descr="preencoded.png">    </p:cNvPr>
+          <p:cNvPr id="4" name="Image 0" descr="preencoded.png"/>
           <p:cNvPicPr>
             <a:picLocks noChangeAspect="1"/>
           </p:cNvPicPr>
           <p:nvPr/>
         </p:nvPicPr>
         <p:blipFill>
-          <a:blip r:embed="rId1"/>
+          <a:blip r:embed="rId3"/>
           <a:stretch>
             <a:fillRect/>
           </a:stretch>
@@ -4448,7 +4380,7 @@
           <a:bodyPr wrap="square" lIns="0" tIns="0" rIns="0" bIns="0" rtlCol="0" anchor="ctr"/>
           <a:lstStyle/>
           <a:p>
-            <a:pPr algn="ctr" indent="0" marL="0">
+            <a:pPr marL="0" indent="0" algn="ctr">
               <a:buNone/>
             </a:pPr>
             <a:r>
@@ -4487,7 +4419,7 @@
           <a:bodyPr wrap="square" lIns="0" tIns="0" rIns="0" bIns="0" rtlCol="0" anchor="ctr"/>
           <a:lstStyle/>
           <a:p>
-            <a:pPr algn="ctr" indent="0" marL="0">
+            <a:pPr marL="0" indent="0" algn="ctr">
               <a:buNone/>
             </a:pPr>
             <a:r>
@@ -4526,6 +4458,13 @@
           </a:solidFill>
           <a:ln/>
         </p:spPr>
+        <p:txBody>
+          <a:bodyPr/>
+          <a:lstStyle/>
+          <a:p>
+            <a:endParaRPr lang="en-US"/>
+          </a:p>
+        </p:txBody>
       </p:sp>
       <p:sp>
         <p:nvSpPr>
@@ -4548,7 +4487,7 @@
           <a:bodyPr wrap="square" lIns="0" tIns="0" rIns="0" bIns="0" rtlCol="0" anchor="ctr"/>
           <a:lstStyle/>
           <a:p>
-            <a:pPr indent="0" marL="0">
+            <a:pPr marL="0" indent="0">
               <a:buNone/>
             </a:pPr>
             <a:r>
@@ -4562,9 +4501,6 @@
               </a:rPr>
               <a:t>You pay for  —  </a:t>
             </a:r>
-            <a:pPr indent="0" marL="0">
-              <a:buNone/>
-            </a:pPr>
             <a:r>
               <a:rPr lang="en-US" sz="1500" dirty="0">
                 <a:solidFill>
@@ -4601,6 +4537,13 @@
           </a:solidFill>
           <a:ln/>
         </p:spPr>
+        <p:txBody>
+          <a:bodyPr/>
+          <a:lstStyle/>
+          <a:p>
+            <a:endParaRPr lang="en-US"/>
+          </a:p>
+        </p:txBody>
       </p:sp>
       <p:sp>
         <p:nvSpPr>
@@ -4623,7 +4566,7 @@
           <a:bodyPr wrap="square" lIns="0" tIns="0" rIns="0" bIns="0" rtlCol="0" anchor="ctr"/>
           <a:lstStyle/>
           <a:p>
-            <a:pPr indent="0" marL="0">
+            <a:pPr marL="0" indent="0">
               <a:buNone/>
             </a:pPr>
             <a:r>
@@ -4637,9 +4580,6 @@
               </a:rPr>
               <a:t>You need it  —  </a:t>
             </a:r>
-            <a:pPr indent="0" marL="0">
-              <a:buNone/>
-            </a:pPr>
             <a:r>
               <a:rPr lang="en-US" sz="1500" dirty="0">
                 <a:solidFill>
@@ -4676,6 +4616,13 @@
           </a:solidFill>
           <a:ln/>
         </p:spPr>
+        <p:txBody>
+          <a:bodyPr/>
+          <a:lstStyle/>
+          <a:p>
+            <a:endParaRPr lang="en-US"/>
+          </a:p>
+        </p:txBody>
       </p:sp>
       <p:sp>
         <p:nvSpPr>
@@ -4698,7 +4645,7 @@
           <a:bodyPr wrap="square" lIns="0" tIns="0" rIns="0" bIns="0" rtlCol="0" anchor="ctr"/>
           <a:lstStyle/>
           <a:p>
-            <a:pPr indent="0" marL="0">
+            <a:pPr marL="0" indent="0">
               <a:buNone/>
             </a:pPr>
             <a:r>
@@ -4712,9 +4659,6 @@
               </a:rPr>
               <a:t>The gap  —  </a:t>
             </a:r>
-            <a:pPr indent="0" marL="0">
-              <a:buNone/>
-            </a:pPr>
             <a:r>
               <a:rPr lang="en-US" sz="1500" dirty="0">
                 <a:solidFill>
@@ -4746,6 +4690,7 @@
         <a:solidFill>
           <a:srgbClr val="FFFFFF"/>
         </a:solidFill>
+        <a:effectLst/>
       </p:bgPr>
     </p:bg>
     <p:spTree>
@@ -4783,7 +4728,7 @@
           <a:bodyPr wrap="square" lIns="0" tIns="0" rIns="0" bIns="0" rtlCol="0" anchor="ctr"/>
           <a:lstStyle/>
           <a:p>
-            <a:pPr indent="0" marL="0">
+            <a:pPr marL="0" indent="0">
               <a:buNone/>
             </a:pPr>
             <a:r>
@@ -4822,7 +4767,7 @@
           <a:bodyPr wrap="square" lIns="0" tIns="0" rIns="0" bIns="0" rtlCol="0" anchor="ctr"/>
           <a:lstStyle/>
           <a:p>
-            <a:pPr indent="0" marL="0">
+            <a:pPr marL="0" indent="0">
               <a:buNone/>
             </a:pPr>
             <a:r>
@@ -4861,13 +4806,20 @@
           </a:solidFill>
           <a:ln/>
           <a:effectLst>
-            <a:outerShdw sx="100000" sy="100000" kx="0" ky="0" algn="bl" rotWithShape="0" blurRad="76200" dist="25400" dir="2700000">
+            <a:outerShdw blurRad="76200" dist="25400" dir="2700000" algn="bl" rotWithShape="0">
               <a:srgbClr val="000000">
                 <a:alpha val="14000"/>
               </a:srgbClr>
             </a:outerShdw>
           </a:effectLst>
         </p:spPr>
+        <p:txBody>
+          <a:bodyPr/>
+          <a:lstStyle/>
+          <a:p>
+            <a:endParaRPr lang="en-US"/>
+          </a:p>
+        </p:txBody>
       </p:sp>
       <p:sp>
         <p:nvSpPr>
@@ -4890,7 +4842,7 @@
           <a:bodyPr wrap="square" lIns="0" tIns="0" rIns="0" bIns="0" rtlCol="0" anchor="ctr"/>
           <a:lstStyle/>
           <a:p>
-            <a:pPr algn="ctr" indent="0" marL="0">
+            <a:pPr marL="0" indent="0" algn="ctr">
               <a:buNone/>
             </a:pPr>
             <a:r>
@@ -4907,7 +4859,7 @@
             <a:endParaRPr lang="en-US" sz="1300" dirty="0"/>
           </a:p>
           <a:p>
-            <a:pPr algn="ctr" indent="0" marL="0">
+            <a:pPr marL="0" indent="0" algn="ctr">
               <a:buNone/>
             </a:pPr>
             <a:r>
@@ -4948,6 +4900,13 @@
             <a:tailEnd type="triangle"/>
           </a:ln>
         </p:spPr>
+        <p:txBody>
+          <a:bodyPr/>
+          <a:lstStyle/>
+          <a:p>
+            <a:endParaRPr lang="en-US"/>
+          </a:p>
+        </p:txBody>
       </p:sp>
       <p:sp>
         <p:nvSpPr>
@@ -4970,13 +4929,20 @@
           </a:solidFill>
           <a:ln/>
           <a:effectLst>
-            <a:outerShdw sx="100000" sy="100000" kx="0" ky="0" algn="bl" rotWithShape="0" blurRad="76200" dist="25400" dir="2700000">
+            <a:outerShdw blurRad="76200" dist="25400" dir="2700000" algn="bl" rotWithShape="0">
               <a:srgbClr val="000000">
                 <a:alpha val="14000"/>
               </a:srgbClr>
             </a:outerShdw>
           </a:effectLst>
         </p:spPr>
+        <p:txBody>
+          <a:bodyPr/>
+          <a:lstStyle/>
+          <a:p>
+            <a:endParaRPr lang="en-US"/>
+          </a:p>
+        </p:txBody>
       </p:sp>
       <p:sp>
         <p:nvSpPr>
@@ -4999,7 +4965,7 @@
           <a:bodyPr wrap="square" lIns="0" tIns="0" rIns="0" bIns="0" rtlCol="0" anchor="ctr"/>
           <a:lstStyle/>
           <a:p>
-            <a:pPr algn="ctr" indent="0" marL="0">
+            <a:pPr marL="0" indent="0" algn="ctr">
               <a:buNone/>
             </a:pPr>
             <a:r>
@@ -5016,7 +4982,7 @@
             <a:endParaRPr lang="en-US" sz="1300" dirty="0"/>
           </a:p>
           <a:p>
-            <a:pPr algn="ctr" indent="0" marL="0">
+            <a:pPr marL="0" indent="0" algn="ctr">
               <a:buNone/>
             </a:pPr>
             <a:r>
@@ -5057,6 +5023,13 @@
             <a:tailEnd type="triangle"/>
           </a:ln>
         </p:spPr>
+        <p:txBody>
+          <a:bodyPr/>
+          <a:lstStyle/>
+          <a:p>
+            <a:endParaRPr lang="en-US"/>
+          </a:p>
+        </p:txBody>
       </p:sp>
       <p:sp>
         <p:nvSpPr>
@@ -5079,13 +5052,20 @@
           </a:solidFill>
           <a:ln/>
           <a:effectLst>
-            <a:outerShdw sx="100000" sy="100000" kx="0" ky="0" algn="bl" rotWithShape="0" blurRad="76200" dist="25400" dir="2700000">
+            <a:outerShdw blurRad="76200" dist="25400" dir="2700000" algn="bl" rotWithShape="0">
               <a:srgbClr val="000000">
                 <a:alpha val="14000"/>
               </a:srgbClr>
             </a:outerShdw>
           </a:effectLst>
         </p:spPr>
+        <p:txBody>
+          <a:bodyPr/>
+          <a:lstStyle/>
+          <a:p>
+            <a:endParaRPr lang="en-US"/>
+          </a:p>
+        </p:txBody>
       </p:sp>
       <p:sp>
         <p:nvSpPr>
@@ -5108,7 +5088,7 @@
           <a:bodyPr wrap="square" lIns="0" tIns="0" rIns="0" bIns="0" rtlCol="0" anchor="ctr"/>
           <a:lstStyle/>
           <a:p>
-            <a:pPr algn="ctr" indent="0" marL="0">
+            <a:pPr marL="0" indent="0" algn="ctr">
               <a:buNone/>
             </a:pPr>
             <a:r>
@@ -5147,13 +5127,20 @@
           </a:solidFill>
           <a:ln/>
           <a:effectLst>
-            <a:outerShdw sx="100000" sy="100000" kx="0" ky="0" algn="bl" rotWithShape="0" blurRad="76200" dist="25400" dir="2700000">
+            <a:outerShdw blurRad="76200" dist="25400" dir="2700000" algn="bl" rotWithShape="0">
               <a:srgbClr val="000000">
                 <a:alpha val="14000"/>
               </a:srgbClr>
             </a:outerShdw>
           </a:effectLst>
         </p:spPr>
+        <p:txBody>
+          <a:bodyPr/>
+          <a:lstStyle/>
+          <a:p>
+            <a:endParaRPr lang="en-US"/>
+          </a:p>
+        </p:txBody>
       </p:sp>
       <p:sp>
         <p:nvSpPr>
@@ -5176,7 +5163,7 @@
           <a:bodyPr wrap="square" lIns="0" tIns="0" rIns="0" bIns="0" rtlCol="0" anchor="ctr"/>
           <a:lstStyle/>
           <a:p>
-            <a:pPr algn="ctr" indent="0" marL="0">
+            <a:pPr marL="0" indent="0" algn="ctr">
               <a:buNone/>
             </a:pPr>
             <a:r>
@@ -5215,13 +5202,20 @@
           </a:solidFill>
           <a:ln/>
           <a:effectLst>
-            <a:outerShdw sx="100000" sy="100000" kx="0" ky="0" algn="bl" rotWithShape="0" blurRad="76200" dist="25400" dir="2700000">
+            <a:outerShdw blurRad="76200" dist="25400" dir="2700000" algn="bl" rotWithShape="0">
               <a:srgbClr val="000000">
                 <a:alpha val="14000"/>
               </a:srgbClr>
             </a:outerShdw>
           </a:effectLst>
         </p:spPr>
+        <p:txBody>
+          <a:bodyPr/>
+          <a:lstStyle/>
+          <a:p>
+            <a:endParaRPr lang="en-US"/>
+          </a:p>
+        </p:txBody>
       </p:sp>
       <p:sp>
         <p:nvSpPr>
@@ -5244,7 +5238,7 @@
           <a:bodyPr wrap="square" lIns="0" tIns="0" rIns="0" bIns="0" rtlCol="0" anchor="ctr"/>
           <a:lstStyle/>
           <a:p>
-            <a:pPr algn="ctr" indent="0" marL="0">
+            <a:pPr marL="0" indent="0" algn="ctr">
               <a:buNone/>
             </a:pPr>
             <a:r>
@@ -5285,6 +5279,13 @@
             <a:tailEnd type="triangle"/>
           </a:ln>
         </p:spPr>
+        <p:txBody>
+          <a:bodyPr/>
+          <a:lstStyle/>
+          <a:p>
+            <a:endParaRPr lang="en-US"/>
+          </a:p>
+        </p:txBody>
       </p:sp>
       <p:sp>
         <p:nvSpPr>
@@ -5307,13 +5308,20 @@
           </a:solidFill>
           <a:ln/>
           <a:effectLst>
-            <a:outerShdw sx="100000" sy="100000" kx="0" ky="0" algn="bl" rotWithShape="0" blurRad="76200" dist="25400" dir="2700000">
+            <a:outerShdw blurRad="76200" dist="25400" dir="2700000" algn="bl" rotWithShape="0">
               <a:srgbClr val="000000">
                 <a:alpha val="14000"/>
               </a:srgbClr>
             </a:outerShdw>
           </a:effectLst>
         </p:spPr>
+        <p:txBody>
+          <a:bodyPr/>
+          <a:lstStyle/>
+          <a:p>
+            <a:endParaRPr lang="en-US"/>
+          </a:p>
+        </p:txBody>
       </p:sp>
       <p:sp>
         <p:nvSpPr>
@@ -5336,7 +5344,7 @@
           <a:bodyPr wrap="square" lIns="0" tIns="0" rIns="0" bIns="0" rtlCol="0" anchor="ctr"/>
           <a:lstStyle/>
           <a:p>
-            <a:pPr algn="ctr" indent="0" marL="0">
+            <a:pPr marL="0" indent="0" algn="ctr">
               <a:buNone/>
             </a:pPr>
             <a:r>
@@ -5353,7 +5361,7 @@
             <a:endParaRPr lang="en-US" sz="1300" dirty="0"/>
           </a:p>
           <a:p>
-            <a:pPr algn="ctr" indent="0" marL="0">
+            <a:pPr marL="0" indent="0" algn="ctr">
               <a:buNone/>
             </a:pPr>
             <a:r>
@@ -5392,6 +5400,13 @@
           </a:solidFill>
           <a:ln/>
         </p:spPr>
+        <p:txBody>
+          <a:bodyPr/>
+          <a:lstStyle/>
+          <a:p>
+            <a:endParaRPr lang="en-US"/>
+          </a:p>
+        </p:txBody>
       </p:sp>
       <p:sp>
         <p:nvSpPr>
@@ -5414,7 +5429,7 @@
           <a:bodyPr wrap="square" lIns="0" tIns="0" rIns="0" bIns="0" rtlCol="0" anchor="ctr"/>
           <a:lstStyle/>
           <a:p>
-            <a:pPr algn="ctr" indent="0" marL="0">
+            <a:pPr marL="0" indent="0" algn="ctr">
               <a:buNone/>
             </a:pPr>
             <a:r>
@@ -5453,6 +5468,13 @@
           </a:solidFill>
           <a:ln/>
         </p:spPr>
+        <p:txBody>
+          <a:bodyPr/>
+          <a:lstStyle/>
+          <a:p>
+            <a:endParaRPr lang="en-US"/>
+          </a:p>
+        </p:txBody>
       </p:sp>
       <p:sp>
         <p:nvSpPr>
@@ -5475,7 +5497,7 @@
           <a:bodyPr wrap="square" lIns="0" tIns="0" rIns="0" bIns="0" rtlCol="0" anchor="ctr"/>
           <a:lstStyle/>
           <a:p>
-            <a:pPr algn="ctr" indent="0" marL="0">
+            <a:pPr marL="0" indent="0" algn="ctr">
               <a:buNone/>
             </a:pPr>
             <a:r>
@@ -5514,6 +5536,13 @@
           </a:solidFill>
           <a:ln/>
         </p:spPr>
+        <p:txBody>
+          <a:bodyPr/>
+          <a:lstStyle/>
+          <a:p>
+            <a:endParaRPr lang="en-US"/>
+          </a:p>
+        </p:txBody>
       </p:sp>
       <p:sp>
         <p:nvSpPr>
@@ -5536,7 +5565,7 @@
           <a:bodyPr wrap="square" lIns="0" tIns="0" rIns="0" bIns="0" rtlCol="0" anchor="ctr"/>
           <a:lstStyle/>
           <a:p>
-            <a:pPr algn="ctr" indent="0" marL="0">
+            <a:pPr marL="0" indent="0" algn="ctr">
               <a:buNone/>
             </a:pPr>
             <a:r>
@@ -5575,6 +5604,13 @@
           </a:solidFill>
           <a:ln/>
         </p:spPr>
+        <p:txBody>
+          <a:bodyPr/>
+          <a:lstStyle/>
+          <a:p>
+            <a:endParaRPr lang="en-US"/>
+          </a:p>
+        </p:txBody>
       </p:sp>
       <p:sp>
         <p:nvSpPr>
@@ -5597,7 +5633,7 @@
           <a:bodyPr wrap="square" lIns="0" tIns="0" rIns="0" bIns="0" rtlCol="0" anchor="ctr"/>
           <a:lstStyle/>
           <a:p>
-            <a:pPr algn="ctr" indent="0" marL="0">
+            <a:pPr marL="0" indent="0" algn="ctr">
               <a:buNone/>
             </a:pPr>
             <a:r>
@@ -5636,6 +5672,13 @@
           </a:solidFill>
           <a:ln/>
         </p:spPr>
+        <p:txBody>
+          <a:bodyPr/>
+          <a:lstStyle/>
+          <a:p>
+            <a:endParaRPr lang="en-US"/>
+          </a:p>
+        </p:txBody>
       </p:sp>
       <p:sp>
         <p:nvSpPr>
@@ -5658,7 +5701,7 @@
           <a:bodyPr wrap="square" lIns="0" tIns="0" rIns="0" bIns="0" rtlCol="0" anchor="ctr"/>
           <a:lstStyle/>
           <a:p>
-            <a:pPr algn="ctr" indent="0" marL="0">
+            <a:pPr marL="0" indent="0" algn="ctr">
               <a:buNone/>
             </a:pPr>
             <a:r>
@@ -5692,6 +5735,7 @@
         <a:solidFill>
           <a:srgbClr val="FFFFFF"/>
         </a:solidFill>
+        <a:effectLst/>
       </p:bgPr>
     </p:bg>
     <p:spTree>
@@ -5729,7 +5773,7 @@
           <a:bodyPr wrap="square" lIns="0" tIns="0" rIns="0" bIns="0" rtlCol="0" anchor="ctr"/>
           <a:lstStyle/>
           <a:p>
-            <a:pPr indent="0" marL="0">
+            <a:pPr marL="0" indent="0">
               <a:buNone/>
             </a:pPr>
             <a:r>
@@ -5741,7 +5785,7 @@
                 <a:ea typeface="Cambria" pitchFamily="34" charset="-122"/>
                 <a:cs typeface="Cambria" pitchFamily="34" charset="-120"/>
               </a:rPr>
-              <a:t>The lifecycle you'll watch all afternoon</a:t>
+              <a:t>The lifecycle you'll watch all morning</a:t>
             </a:r>
             <a:endParaRPr lang="en-US" sz="3000" dirty="0"/>
           </a:p>
@@ -5768,13 +5812,20 @@
           </a:solidFill>
           <a:ln/>
           <a:effectLst>
-            <a:outerShdw sx="100000" sy="100000" kx="0" ky="0" algn="bl" rotWithShape="0" blurRad="76200" dist="25400" dir="2700000">
+            <a:outerShdw blurRad="76200" dist="25400" dir="2700000" algn="bl" rotWithShape="0">
               <a:srgbClr val="000000">
                 <a:alpha val="14000"/>
               </a:srgbClr>
             </a:outerShdw>
           </a:effectLst>
         </p:spPr>
+        <p:txBody>
+          <a:bodyPr/>
+          <a:lstStyle/>
+          <a:p>
+            <a:endParaRPr lang="en-US"/>
+          </a:p>
+        </p:txBody>
       </p:sp>
       <p:sp>
         <p:nvSpPr>
@@ -5797,7 +5848,7 @@
           <a:bodyPr wrap="square" lIns="0" tIns="0" rIns="0" bIns="0" rtlCol="0" anchor="ctr"/>
           <a:lstStyle/>
           <a:p>
-            <a:pPr algn="ctr" indent="0" marL="0">
+            <a:pPr marL="0" indent="0" algn="ctr">
               <a:buNone/>
             </a:pPr>
             <a:r>
@@ -5836,7 +5887,7 @@
           <a:bodyPr wrap="square" lIns="0" tIns="0" rIns="0" bIns="0" rtlCol="0" anchor="ctr"/>
           <a:lstStyle/>
           <a:p>
-            <a:pPr algn="ctr" indent="0" marL="0">
+            <a:pPr marL="0" indent="0" algn="ctr">
               <a:buNone/>
             </a:pPr>
             <a:r>
@@ -5877,6 +5928,13 @@
             <a:tailEnd type="triangle"/>
           </a:ln>
         </p:spPr>
+        <p:txBody>
+          <a:bodyPr/>
+          <a:lstStyle/>
+          <a:p>
+            <a:endParaRPr lang="en-US"/>
+          </a:p>
+        </p:txBody>
       </p:sp>
       <p:sp>
         <p:nvSpPr>
@@ -5899,13 +5957,20 @@
           </a:solidFill>
           <a:ln/>
           <a:effectLst>
-            <a:outerShdw sx="100000" sy="100000" kx="0" ky="0" algn="bl" rotWithShape="0" blurRad="76200" dist="25400" dir="2700000">
+            <a:outerShdw blurRad="76200" dist="25400" dir="2700000" algn="bl" rotWithShape="0">
               <a:srgbClr val="000000">
                 <a:alpha val="14000"/>
               </a:srgbClr>
             </a:outerShdw>
           </a:effectLst>
         </p:spPr>
+        <p:txBody>
+          <a:bodyPr/>
+          <a:lstStyle/>
+          <a:p>
+            <a:endParaRPr lang="en-US"/>
+          </a:p>
+        </p:txBody>
       </p:sp>
       <p:sp>
         <p:nvSpPr>
@@ -5928,7 +5993,7 @@
           <a:bodyPr wrap="square" lIns="0" tIns="0" rIns="0" bIns="0" rtlCol="0" anchor="ctr"/>
           <a:lstStyle/>
           <a:p>
-            <a:pPr algn="ctr" indent="0" marL="0">
+            <a:pPr marL="0" indent="0" algn="ctr">
               <a:buNone/>
             </a:pPr>
             <a:r>
@@ -5967,7 +6032,7 @@
           <a:bodyPr wrap="square" lIns="0" tIns="0" rIns="0" bIns="0" rtlCol="0" anchor="ctr"/>
           <a:lstStyle/>
           <a:p>
-            <a:pPr algn="ctr" indent="0" marL="0">
+            <a:pPr marL="0" indent="0" algn="ctr">
               <a:buNone/>
             </a:pPr>
             <a:r>
@@ -6008,6 +6073,13 @@
             <a:tailEnd type="triangle"/>
           </a:ln>
         </p:spPr>
+        <p:txBody>
+          <a:bodyPr/>
+          <a:lstStyle/>
+          <a:p>
+            <a:endParaRPr lang="en-US"/>
+          </a:p>
+        </p:txBody>
       </p:sp>
       <p:sp>
         <p:nvSpPr>
@@ -6030,13 +6102,20 @@
           </a:solidFill>
           <a:ln/>
           <a:effectLst>
-            <a:outerShdw sx="100000" sy="100000" kx="0" ky="0" algn="bl" rotWithShape="0" blurRad="76200" dist="25400" dir="2700000">
+            <a:outerShdw blurRad="76200" dist="25400" dir="2700000" algn="bl" rotWithShape="0">
               <a:srgbClr val="000000">
                 <a:alpha val="14000"/>
               </a:srgbClr>
             </a:outerShdw>
           </a:effectLst>
         </p:spPr>
+        <p:txBody>
+          <a:bodyPr/>
+          <a:lstStyle/>
+          <a:p>
+            <a:endParaRPr lang="en-US"/>
+          </a:p>
+        </p:txBody>
       </p:sp>
       <p:sp>
         <p:nvSpPr>
@@ -6059,7 +6138,7 @@
           <a:bodyPr wrap="square" lIns="0" tIns="0" rIns="0" bIns="0" rtlCol="0" anchor="ctr"/>
           <a:lstStyle/>
           <a:p>
-            <a:pPr algn="ctr" indent="0" marL="0">
+            <a:pPr marL="0" indent="0" algn="ctr">
               <a:buNone/>
             </a:pPr>
             <a:r>
@@ -6098,7 +6177,7 @@
           <a:bodyPr wrap="square" lIns="0" tIns="0" rIns="0" bIns="0" rtlCol="0" anchor="ctr"/>
           <a:lstStyle/>
           <a:p>
-            <a:pPr algn="ctr" indent="0" marL="0">
+            <a:pPr marL="0" indent="0" algn="ctr">
               <a:buNone/>
             </a:pPr>
             <a:r>
@@ -6139,6 +6218,13 @@
             <a:tailEnd type="triangle"/>
           </a:ln>
         </p:spPr>
+        <p:txBody>
+          <a:bodyPr/>
+          <a:lstStyle/>
+          <a:p>
+            <a:endParaRPr lang="en-US"/>
+          </a:p>
+        </p:txBody>
       </p:sp>
       <p:sp>
         <p:nvSpPr>
@@ -6161,13 +6247,20 @@
           </a:solidFill>
           <a:ln/>
           <a:effectLst>
-            <a:outerShdw sx="100000" sy="100000" kx="0" ky="0" algn="bl" rotWithShape="0" blurRad="76200" dist="25400" dir="2700000">
+            <a:outerShdw blurRad="76200" dist="25400" dir="2700000" algn="bl" rotWithShape="0">
               <a:srgbClr val="000000">
                 <a:alpha val="14000"/>
               </a:srgbClr>
             </a:outerShdw>
           </a:effectLst>
         </p:spPr>
+        <p:txBody>
+          <a:bodyPr/>
+          <a:lstStyle/>
+          <a:p>
+            <a:endParaRPr lang="en-US"/>
+          </a:p>
+        </p:txBody>
       </p:sp>
       <p:sp>
         <p:nvSpPr>
@@ -6190,7 +6283,7 @@
           <a:bodyPr wrap="square" lIns="0" tIns="0" rIns="0" bIns="0" rtlCol="0" anchor="ctr"/>
           <a:lstStyle/>
           <a:p>
-            <a:pPr algn="ctr" indent="0" marL="0">
+            <a:pPr marL="0" indent="0" algn="ctr">
               <a:buNone/>
             </a:pPr>
             <a:r>
@@ -6229,7 +6322,7 @@
           <a:bodyPr wrap="square" lIns="0" tIns="0" rIns="0" bIns="0" rtlCol="0" anchor="ctr"/>
           <a:lstStyle/>
           <a:p>
-            <a:pPr algn="ctr" indent="0" marL="0">
+            <a:pPr marL="0" indent="0" algn="ctr">
               <a:buNone/>
             </a:pPr>
             <a:r>
@@ -6268,6 +6361,13 @@
           </a:solidFill>
           <a:ln/>
         </p:spPr>
+        <p:txBody>
+          <a:bodyPr/>
+          <a:lstStyle/>
+          <a:p>
+            <a:endParaRPr lang="en-US"/>
+          </a:p>
+        </p:txBody>
       </p:sp>
       <p:sp>
         <p:nvSpPr>
@@ -6290,7 +6390,7 @@
           <a:bodyPr wrap="square" lIns="0" tIns="0" rIns="0" bIns="0" rtlCol="0" anchor="ctr"/>
           <a:lstStyle/>
           <a:p>
-            <a:pPr indent="0" marL="0">
+            <a:pPr marL="0" indent="0">
               <a:buNone/>
             </a:pPr>
             <a:r>
@@ -6304,9 +6404,6 @@
               </a:rPr>
               <a:t>Emergency lever:  </a:t>
             </a:r>
-            <a:pPr indent="0" marL="0">
-              <a:buNone/>
-            </a:pPr>
             <a:r>
               <a:rPr lang="en-US" sz="1400" b="1" dirty="0">
                 <a:solidFill>
@@ -6318,9 +6415,6 @@
               </a:rPr>
               <a:t>killSwitch: true</a:t>
             </a:r>
-            <a:pPr indent="0" marL="0">
-              <a:buNone/>
-            </a:pPr>
             <a:r>
               <a:rPr lang="en-US" sz="1400" dirty="0">
                 <a:solidFill>
@@ -6352,6 +6446,7 @@
         <a:solidFill>
           <a:srgbClr val="1E2761"/>
         </a:solidFill>
+        <a:effectLst/>
       </p:bgPr>
     </p:bg>
     <p:spTree>
@@ -6389,7 +6484,7 @@
           <a:bodyPr wrap="square" lIns="0" tIns="0" rIns="0" bIns="0" rtlCol="0" anchor="ctr"/>
           <a:lstStyle/>
           <a:p>
-            <a:pPr indent="0" marL="0">
+            <a:pPr marL="0" indent="0">
               <a:buNone/>
             </a:pPr>
             <a:r>
@@ -6428,6 +6523,13 @@
           </a:solidFill>
           <a:ln/>
         </p:spPr>
+        <p:txBody>
+          <a:bodyPr/>
+          <a:lstStyle/>
+          <a:p>
+            <a:endParaRPr lang="en-US"/>
+          </a:p>
+        </p:txBody>
       </p:sp>
       <p:sp>
         <p:nvSpPr>
@@ -6448,298 +6550,17 @@
           </a:solidFill>
           <a:ln/>
         </p:spPr>
+        <p:txBody>
+          <a:bodyPr/>
+          <a:lstStyle/>
+          <a:p>
+            <a:endParaRPr lang="en-US"/>
+          </a:p>
+        </p:txBody>
       </p:sp>
       <p:pic>
         <p:nvPicPr>
-          <p:cNvPr id="5" name="Image 0" descr="preencoded.png">    </p:cNvPr>
-          <p:cNvPicPr>
-            <a:picLocks noChangeAspect="1"/>
-          </p:cNvPicPr>
-          <p:nvPr/>
-        </p:nvPicPr>
-        <p:blipFill>
-          <a:blip r:embed="rId1"/>
-          <a:stretch>
-            <a:fillRect/>
-          </a:stretch>
-        </p:blipFill>
-        <p:spPr>
-          <a:xfrm>
-            <a:off x="1618488" y="1682496"/>
-            <a:ext cx="329184" cy="329184"/>
-          </a:xfrm>
-          <a:prstGeom prst="rect">
-            <a:avLst/>
-          </a:prstGeom>
-        </p:spPr>
-      </p:pic>
-      <p:sp>
-        <p:nvSpPr>
-          <p:cNvPr id="6" name="Text 3"/>
-          <p:cNvSpPr/>
-          <p:nvPr/>
-        </p:nvSpPr>
-        <p:spPr>
-          <a:xfrm>
-            <a:off x="457200" y="2286000"/>
-            <a:ext cx="2651760" cy="411480"/>
-          </a:xfrm>
-          <a:prstGeom prst="rect">
-            <a:avLst/>
-          </a:prstGeom>
-          <a:noFill/>
-          <a:ln/>
-        </p:spPr>
-        <p:txBody>
-          <a:bodyPr wrap="square" lIns="0" tIns="0" rIns="0" bIns="0" rtlCol="0" anchor="ctr"/>
-          <a:lstStyle/>
-          <a:p>
-            <a:pPr algn="ctr" indent="0" marL="0">
-              <a:buNone/>
-            </a:pPr>
-            <a:r>
-              <a:rPr lang="en-US" sz="1500" b="1" dirty="0">
-                <a:solidFill>
-                  <a:srgbClr val="FFFFFF"/>
-                </a:solidFill>
-                <a:latin typeface="Cambria" pitchFamily="34" charset="0"/>
-                <a:ea typeface="Cambria" pitchFamily="34" charset="-122"/>
-                <a:cs typeface="Cambria" pitchFamily="34" charset="-120"/>
-              </a:rPr>
-              <a:t>Choose your adventure ×2</a:t>
-            </a:r>
-            <a:endParaRPr lang="en-US" sz="1500" dirty="0"/>
-          </a:p>
-        </p:txBody>
-      </p:sp>
-      <p:sp>
-        <p:nvSpPr>
-          <p:cNvPr id="7" name="Text 4"/>
-          <p:cNvSpPr/>
-          <p:nvPr/>
-        </p:nvSpPr>
-        <p:spPr>
-          <a:xfrm>
-            <a:off x="658368" y="2724912"/>
-            <a:ext cx="2249424" cy="1143000"/>
-          </a:xfrm>
-          <a:prstGeom prst="rect">
-            <a:avLst/>
-          </a:prstGeom>
-          <a:noFill/>
-          <a:ln/>
-        </p:spPr>
-        <p:txBody>
-          <a:bodyPr wrap="square" lIns="0" tIns="0" rIns="0" bIns="0" rtlCol="0" anchor="ctr"/>
-          <a:lstStyle/>
-          <a:p>
-            <a:pPr algn="ctr" indent="0" marL="0">
-              <a:buNone/>
-            </a:pPr>
-            <a:r>
-              <a:rPr lang="en-US" sz="1100" dirty="0">
-                <a:solidFill>
-                  <a:srgbClr val="CADCFC"/>
-                </a:solidFill>
-                <a:latin typeface="Calibri" pitchFamily="34" charset="0"/>
-                <a:ea typeface="Calibri" pitchFamily="34" charset="-122"/>
-                <a:cs typeface="Calibri" pitchFamily="34" charset="-120"/>
-              </a:rPr>
-              <a:t>Pick a scenario flavour (simplified vs real), then an environment tier (browser vs local). Same flags either way.</a:t>
-            </a:r>
-            <a:endParaRPr lang="en-US" sz="1100" dirty="0"/>
-          </a:p>
-        </p:txBody>
-      </p:sp>
-      <p:sp>
-        <p:nvSpPr>
-          <p:cNvPr id="8" name="Shape 5"/>
-          <p:cNvSpPr/>
-          <p:nvPr/>
-        </p:nvSpPr>
-        <p:spPr>
-          <a:xfrm>
-            <a:off x="3319272" y="1325880"/>
-            <a:ext cx="2651760" cy="2651760"/>
-          </a:xfrm>
-          <a:prstGeom prst="roundRect">
-            <a:avLst>
-              <a:gd name="adj" fmla="val 3448"/>
-            </a:avLst>
-          </a:prstGeom>
-          <a:solidFill>
-            <a:srgbClr val="27336E"/>
-          </a:solidFill>
-          <a:ln/>
-        </p:spPr>
-      </p:sp>
-      <p:sp>
-        <p:nvSpPr>
-          <p:cNvPr id="9" name="Shape 6"/>
-          <p:cNvSpPr/>
-          <p:nvPr/>
-        </p:nvSpPr>
-        <p:spPr>
-          <a:xfrm>
-            <a:off x="4352544" y="1554480"/>
-            <a:ext cx="585216" cy="585216"/>
-          </a:xfrm>
-          <a:prstGeom prst="ellipse">
-            <a:avLst/>
-          </a:prstGeom>
-          <a:solidFill>
-            <a:srgbClr val="2EC4B6"/>
-          </a:solidFill>
-          <a:ln/>
-        </p:spPr>
-      </p:sp>
-      <p:pic>
-        <p:nvPicPr>
-          <p:cNvPr id="10" name="Image 1" descr="preencoded.png">    </p:cNvPr>
-          <p:cNvPicPr>
-            <a:picLocks noChangeAspect="1"/>
-          </p:cNvPicPr>
-          <p:nvPr/>
-        </p:nvPicPr>
-        <p:blipFill>
-          <a:blip r:embed="rId2"/>
-          <a:stretch>
-            <a:fillRect/>
-          </a:stretch>
-        </p:blipFill>
-        <p:spPr>
-          <a:xfrm>
-            <a:off x="4480560" y="1682496"/>
-            <a:ext cx="329184" cy="329184"/>
-          </a:xfrm>
-          <a:prstGeom prst="rect">
-            <a:avLst/>
-          </a:prstGeom>
-        </p:spPr>
-      </p:pic>
-      <p:sp>
-        <p:nvSpPr>
-          <p:cNvPr id="11" name="Text 7"/>
-          <p:cNvSpPr/>
-          <p:nvPr/>
-        </p:nvSpPr>
-        <p:spPr>
-          <a:xfrm>
-            <a:off x="3319272" y="2286000"/>
-            <a:ext cx="2651760" cy="411480"/>
-          </a:xfrm>
-          <a:prstGeom prst="rect">
-            <a:avLst/>
-          </a:prstGeom>
-          <a:noFill/>
-          <a:ln/>
-        </p:spPr>
-        <p:txBody>
-          <a:bodyPr wrap="square" lIns="0" tIns="0" rIns="0" bIns="0" rtlCol="0" anchor="ctr"/>
-          <a:lstStyle/>
-          <a:p>
-            <a:pPr algn="ctr" indent="0" marL="0">
-              <a:buNone/>
-            </a:pPr>
-            <a:r>
-              <a:rPr lang="en-US" sz="1500" b="1" dirty="0">
-                <a:solidFill>
-                  <a:srgbClr val="FFFFFF"/>
-                </a:solidFill>
-                <a:latin typeface="Cambria" pitchFamily="34" charset="0"/>
-                <a:ea typeface="Cambria" pitchFamily="34" charset="-122"/>
-                <a:cs typeface="Cambria" pitchFamily="34" charset="-120"/>
-              </a:rPr>
-              <a:t>Capture flags</a:t>
-            </a:r>
-            <a:endParaRPr lang="en-US" sz="1500" dirty="0"/>
-          </a:p>
-        </p:txBody>
-      </p:sp>
-      <p:sp>
-        <p:nvSpPr>
-          <p:cNvPr id="12" name="Text 8"/>
-          <p:cNvSpPr/>
-          <p:nvPr/>
-        </p:nvSpPr>
-        <p:spPr>
-          <a:xfrm>
-            <a:off x="3520440" y="2724912"/>
-            <a:ext cx="2249424" cy="1143000"/>
-          </a:xfrm>
-          <a:prstGeom prst="rect">
-            <a:avLst/>
-          </a:prstGeom>
-          <a:noFill/>
-          <a:ln/>
-        </p:spPr>
-        <p:txBody>
-          <a:bodyPr wrap="square" lIns="0" tIns="0" rIns="0" bIns="0" rtlCol="0" anchor="ctr"/>
-          <a:lstStyle/>
-          <a:p>
-            <a:pPr algn="ctr" indent="0" marL="0">
-              <a:buNone/>
-            </a:pPr>
-            <a:r>
-              <a:rPr lang="en-US" sz="1100" dirty="0">
-                <a:solidFill>
-                  <a:srgbClr val="CADCFC"/>
-                </a:solidFill>
-                <a:latin typeface="Calibri" pitchFamily="34" charset="0"/>
-                <a:ea typeface="Calibri" pitchFamily="34" charset="-122"/>
-                <a:cs typeface="Calibri" pitchFamily="34" charset="-120"/>
-              </a:rPr>
-              <a:t>Each challenge emits FLAG{…} when your cluster reaches the right state. CHECK button or verify.sh — no honour system.</a:t>
-            </a:r>
-            <a:endParaRPr lang="en-US" sz="1100" dirty="0"/>
-          </a:p>
-        </p:txBody>
-      </p:sp>
-      <p:sp>
-        <p:nvSpPr>
-          <p:cNvPr id="13" name="Shape 9"/>
-          <p:cNvSpPr/>
-          <p:nvPr/>
-        </p:nvSpPr>
-        <p:spPr>
-          <a:xfrm>
-            <a:off x="6181344" y="1325880"/>
-            <a:ext cx="2651760" cy="2651760"/>
-          </a:xfrm>
-          <a:prstGeom prst="roundRect">
-            <a:avLst>
-              <a:gd name="adj" fmla="val 3448"/>
-            </a:avLst>
-          </a:prstGeom>
-          <a:solidFill>
-            <a:srgbClr val="27336E"/>
-          </a:solidFill>
-          <a:ln/>
-        </p:spPr>
-      </p:sp>
-      <p:sp>
-        <p:nvSpPr>
-          <p:cNvPr id="14" name="Shape 10"/>
-          <p:cNvSpPr/>
-          <p:nvPr/>
-        </p:nvSpPr>
-        <p:spPr>
-          <a:xfrm>
-            <a:off x="7214616" y="1554480"/>
-            <a:ext cx="585216" cy="585216"/>
-          </a:xfrm>
-          <a:prstGeom prst="ellipse">
-            <a:avLst/>
-          </a:prstGeom>
-          <a:solidFill>
-            <a:srgbClr val="2EC4B6"/>
-          </a:solidFill>
-          <a:ln/>
-        </p:spPr>
-      </p:sp>
-      <p:pic>
-        <p:nvPicPr>
-          <p:cNvPr id="15" name="Image 2" descr="preencoded.png">    </p:cNvPr>
+          <p:cNvPr id="5" name="Image 0" descr="preencoded.png"/>
           <p:cNvPicPr>
             <a:picLocks noChangeAspect="1"/>
           </p:cNvPicPr>
@@ -6753,7 +6574,7 @@
         </p:blipFill>
         <p:spPr>
           <a:xfrm>
-            <a:off x="7342632" y="1682496"/>
+            <a:off x="1618488" y="1682496"/>
             <a:ext cx="329184" cy="329184"/>
           </a:xfrm>
           <a:prstGeom prst="rect">
@@ -6763,13 +6584,13 @@
       </p:pic>
       <p:sp>
         <p:nvSpPr>
-          <p:cNvPr id="16" name="Text 11"/>
-          <p:cNvSpPr/>
-          <p:nvPr/>
-        </p:nvSpPr>
-        <p:spPr>
-          <a:xfrm>
-            <a:off x="6181344" y="2286000"/>
+          <p:cNvPr id="6" name="Text 3"/>
+          <p:cNvSpPr/>
+          <p:nvPr/>
+        </p:nvSpPr>
+        <p:spPr>
+          <a:xfrm>
+            <a:off x="457200" y="2286000"/>
             <a:ext cx="2651760" cy="411480"/>
           </a:xfrm>
           <a:prstGeom prst="rect">
@@ -6782,7 +6603,7 @@
           <a:bodyPr wrap="square" lIns="0" tIns="0" rIns="0" bIns="0" rtlCol="0" anchor="ctr"/>
           <a:lstStyle/>
           <a:p>
-            <a:pPr algn="ctr" indent="0" marL="0">
+            <a:pPr marL="0" indent="0" algn="ctr">
               <a:buNone/>
             </a:pPr>
             <a:r>
@@ -6794,7 +6615,7 @@
                 <a:ea typeface="Cambria" pitchFamily="34" charset="-122"/>
                 <a:cs typeface="Cambria" pitchFamily="34" charset="-120"/>
               </a:rPr>
-              <a:t>Beat the window</a:t>
+              <a:t>Choose your adventure ×2</a:t>
             </a:r>
             <a:endParaRPr lang="en-US" sz="1500" dirty="0"/>
           </a:p>
@@ -6802,13 +6623,13 @@
       </p:sp>
       <p:sp>
         <p:nvSpPr>
-          <p:cNvPr id="17" name="Text 12"/>
-          <p:cNvSpPr/>
-          <p:nvPr/>
-        </p:nvSpPr>
-        <p:spPr>
-          <a:xfrm>
-            <a:off x="6382512" y="2724912"/>
+          <p:cNvPr id="7" name="Text 4"/>
+          <p:cNvSpPr/>
+          <p:nvPr/>
+        </p:nvSpPr>
+        <p:spPr>
+          <a:xfrm>
+            <a:off x="658368" y="2724912"/>
             <a:ext cx="2249424" cy="1143000"/>
           </a:xfrm>
           <a:prstGeom prst="rect">
@@ -6821,7 +6642,7 @@
           <a:bodyPr wrap="square" lIns="0" tIns="0" rIns="0" bIns="0" rtlCol="0" anchor="ctr"/>
           <a:lstStyle/>
           <a:p>
-            <a:pPr algn="ctr" indent="0" marL="0">
+            <a:pPr marL="0" indent="0" algn="ctr">
               <a:buNone/>
             </a:pPr>
             <a:r>
@@ -6833,6 +6654,322 @@
                 <a:ea typeface="Calibri" pitchFamily="34" charset="-122"/>
                 <a:cs typeface="Calibri" pitchFamily="34" charset="-120"/>
               </a:rPr>
+              <a:t>Pick a scenario flavour (simplified vs real), then an environment tier (browser vs local). Same flags either way.</a:t>
+            </a:r>
+            <a:endParaRPr lang="en-US" sz="1100" dirty="0"/>
+          </a:p>
+        </p:txBody>
+      </p:sp>
+      <p:sp>
+        <p:nvSpPr>
+          <p:cNvPr id="8" name="Shape 5"/>
+          <p:cNvSpPr/>
+          <p:nvPr/>
+        </p:nvSpPr>
+        <p:spPr>
+          <a:xfrm>
+            <a:off x="3319272" y="1325880"/>
+            <a:ext cx="2651760" cy="2651760"/>
+          </a:xfrm>
+          <a:prstGeom prst="roundRect">
+            <a:avLst>
+              <a:gd name="adj" fmla="val 3448"/>
+            </a:avLst>
+          </a:prstGeom>
+          <a:solidFill>
+            <a:srgbClr val="27336E"/>
+          </a:solidFill>
+          <a:ln/>
+        </p:spPr>
+        <p:txBody>
+          <a:bodyPr/>
+          <a:lstStyle/>
+          <a:p>
+            <a:endParaRPr lang="en-US"/>
+          </a:p>
+        </p:txBody>
+      </p:sp>
+      <p:sp>
+        <p:nvSpPr>
+          <p:cNvPr id="9" name="Shape 6"/>
+          <p:cNvSpPr/>
+          <p:nvPr/>
+        </p:nvSpPr>
+        <p:spPr>
+          <a:xfrm>
+            <a:off x="4352544" y="1554480"/>
+            <a:ext cx="585216" cy="585216"/>
+          </a:xfrm>
+          <a:prstGeom prst="ellipse">
+            <a:avLst/>
+          </a:prstGeom>
+          <a:solidFill>
+            <a:srgbClr val="2EC4B6"/>
+          </a:solidFill>
+          <a:ln/>
+        </p:spPr>
+        <p:txBody>
+          <a:bodyPr/>
+          <a:lstStyle/>
+          <a:p>
+            <a:endParaRPr lang="en-US"/>
+          </a:p>
+        </p:txBody>
+      </p:sp>
+      <p:pic>
+        <p:nvPicPr>
+          <p:cNvPr id="10" name="Image 1" descr="preencoded.png"/>
+          <p:cNvPicPr>
+            <a:picLocks noChangeAspect="1"/>
+          </p:cNvPicPr>
+          <p:nvPr/>
+        </p:nvPicPr>
+        <p:blipFill>
+          <a:blip r:embed="rId4"/>
+          <a:stretch>
+            <a:fillRect/>
+          </a:stretch>
+        </p:blipFill>
+        <p:spPr>
+          <a:xfrm>
+            <a:off x="4480560" y="1682496"/>
+            <a:ext cx="329184" cy="329184"/>
+          </a:xfrm>
+          <a:prstGeom prst="rect">
+            <a:avLst/>
+          </a:prstGeom>
+        </p:spPr>
+      </p:pic>
+      <p:sp>
+        <p:nvSpPr>
+          <p:cNvPr id="11" name="Text 7"/>
+          <p:cNvSpPr/>
+          <p:nvPr/>
+        </p:nvSpPr>
+        <p:spPr>
+          <a:xfrm>
+            <a:off x="3319272" y="2286000"/>
+            <a:ext cx="2651760" cy="411480"/>
+          </a:xfrm>
+          <a:prstGeom prst="rect">
+            <a:avLst/>
+          </a:prstGeom>
+          <a:noFill/>
+          <a:ln/>
+        </p:spPr>
+        <p:txBody>
+          <a:bodyPr wrap="square" lIns="0" tIns="0" rIns="0" bIns="0" rtlCol="0" anchor="ctr"/>
+          <a:lstStyle/>
+          <a:p>
+            <a:pPr marL="0" indent="0" algn="ctr">
+              <a:buNone/>
+            </a:pPr>
+            <a:r>
+              <a:rPr lang="en-US" sz="1500" b="1" dirty="0">
+                <a:solidFill>
+                  <a:srgbClr val="FFFFFF"/>
+                </a:solidFill>
+                <a:latin typeface="Cambria" pitchFamily="34" charset="0"/>
+                <a:ea typeface="Cambria" pitchFamily="34" charset="-122"/>
+                <a:cs typeface="Cambria" pitchFamily="34" charset="-120"/>
+              </a:rPr>
+              <a:t>Capture flags</a:t>
+            </a:r>
+            <a:endParaRPr lang="en-US" sz="1500" dirty="0"/>
+          </a:p>
+        </p:txBody>
+      </p:sp>
+      <p:sp>
+        <p:nvSpPr>
+          <p:cNvPr id="12" name="Text 8"/>
+          <p:cNvSpPr/>
+          <p:nvPr/>
+        </p:nvSpPr>
+        <p:spPr>
+          <a:xfrm>
+            <a:off x="3520440" y="2724912"/>
+            <a:ext cx="2249424" cy="1143000"/>
+          </a:xfrm>
+          <a:prstGeom prst="rect">
+            <a:avLst/>
+          </a:prstGeom>
+          <a:noFill/>
+          <a:ln/>
+        </p:spPr>
+        <p:txBody>
+          <a:bodyPr wrap="square" lIns="0" tIns="0" rIns="0" bIns="0" rtlCol="0" anchor="ctr"/>
+          <a:lstStyle/>
+          <a:p>
+            <a:pPr marL="0" indent="0" algn="ctr">
+              <a:buNone/>
+            </a:pPr>
+            <a:r>
+              <a:rPr lang="en-US" sz="1100" dirty="0">
+                <a:solidFill>
+                  <a:srgbClr val="CADCFC"/>
+                </a:solidFill>
+                <a:latin typeface="Calibri" pitchFamily="34" charset="0"/>
+                <a:ea typeface="Calibri" pitchFamily="34" charset="-122"/>
+                <a:cs typeface="Calibri" pitchFamily="34" charset="-120"/>
+              </a:rPr>
+              <a:t>Each challenge emits FLAG{…} when your cluster reaches the right state. CHECK button or verify.sh — no honour system.</a:t>
+            </a:r>
+            <a:endParaRPr lang="en-US" sz="1100" dirty="0"/>
+          </a:p>
+        </p:txBody>
+      </p:sp>
+      <p:sp>
+        <p:nvSpPr>
+          <p:cNvPr id="13" name="Shape 9"/>
+          <p:cNvSpPr/>
+          <p:nvPr/>
+        </p:nvSpPr>
+        <p:spPr>
+          <a:xfrm>
+            <a:off x="6181344" y="1325880"/>
+            <a:ext cx="2651760" cy="2651760"/>
+          </a:xfrm>
+          <a:prstGeom prst="roundRect">
+            <a:avLst>
+              <a:gd name="adj" fmla="val 3448"/>
+            </a:avLst>
+          </a:prstGeom>
+          <a:solidFill>
+            <a:srgbClr val="27336E"/>
+          </a:solidFill>
+          <a:ln/>
+        </p:spPr>
+        <p:txBody>
+          <a:bodyPr/>
+          <a:lstStyle/>
+          <a:p>
+            <a:endParaRPr lang="en-US"/>
+          </a:p>
+        </p:txBody>
+      </p:sp>
+      <p:sp>
+        <p:nvSpPr>
+          <p:cNvPr id="14" name="Shape 10"/>
+          <p:cNvSpPr/>
+          <p:nvPr/>
+        </p:nvSpPr>
+        <p:spPr>
+          <a:xfrm>
+            <a:off x="7214616" y="1554480"/>
+            <a:ext cx="585216" cy="585216"/>
+          </a:xfrm>
+          <a:prstGeom prst="ellipse">
+            <a:avLst/>
+          </a:prstGeom>
+          <a:solidFill>
+            <a:srgbClr val="2EC4B6"/>
+          </a:solidFill>
+          <a:ln/>
+        </p:spPr>
+        <p:txBody>
+          <a:bodyPr/>
+          <a:lstStyle/>
+          <a:p>
+            <a:endParaRPr lang="en-US"/>
+          </a:p>
+        </p:txBody>
+      </p:sp>
+      <p:pic>
+        <p:nvPicPr>
+          <p:cNvPr id="15" name="Image 2" descr="preencoded.png"/>
+          <p:cNvPicPr>
+            <a:picLocks noChangeAspect="1"/>
+          </p:cNvPicPr>
+          <p:nvPr/>
+        </p:nvPicPr>
+        <p:blipFill>
+          <a:blip r:embed="rId5"/>
+          <a:stretch>
+            <a:fillRect/>
+          </a:stretch>
+        </p:blipFill>
+        <p:spPr>
+          <a:xfrm>
+            <a:off x="7342632" y="1682496"/>
+            <a:ext cx="329184" cy="329184"/>
+          </a:xfrm>
+          <a:prstGeom prst="rect">
+            <a:avLst/>
+          </a:prstGeom>
+        </p:spPr>
+      </p:pic>
+      <p:sp>
+        <p:nvSpPr>
+          <p:cNvPr id="16" name="Text 11"/>
+          <p:cNvSpPr/>
+          <p:nvPr/>
+        </p:nvSpPr>
+        <p:spPr>
+          <a:xfrm>
+            <a:off x="6181344" y="2286000"/>
+            <a:ext cx="2651760" cy="411480"/>
+          </a:xfrm>
+          <a:prstGeom prst="rect">
+            <a:avLst/>
+          </a:prstGeom>
+          <a:noFill/>
+          <a:ln/>
+        </p:spPr>
+        <p:txBody>
+          <a:bodyPr wrap="square" lIns="0" tIns="0" rIns="0" bIns="0" rtlCol="0" anchor="ctr"/>
+          <a:lstStyle/>
+          <a:p>
+            <a:pPr marL="0" indent="0" algn="ctr">
+              <a:buNone/>
+            </a:pPr>
+            <a:r>
+              <a:rPr lang="en-US" sz="1500" b="1" dirty="0">
+                <a:solidFill>
+                  <a:srgbClr val="FFFFFF"/>
+                </a:solidFill>
+                <a:latin typeface="Cambria" pitchFamily="34" charset="0"/>
+                <a:ea typeface="Cambria" pitchFamily="34" charset="-122"/>
+                <a:cs typeface="Cambria" pitchFamily="34" charset="-120"/>
+              </a:rPr>
+              <a:t>Beat the window</a:t>
+            </a:r>
+            <a:endParaRPr lang="en-US" sz="1500" dirty="0"/>
+          </a:p>
+        </p:txBody>
+      </p:sp>
+      <p:sp>
+        <p:nvSpPr>
+          <p:cNvPr id="17" name="Text 12"/>
+          <p:cNvSpPr/>
+          <p:nvPr/>
+        </p:nvSpPr>
+        <p:spPr>
+          <a:xfrm>
+            <a:off x="6382512" y="2724912"/>
+            <a:ext cx="2249424" cy="1143000"/>
+          </a:xfrm>
+          <a:prstGeom prst="rect">
+            <a:avLst/>
+          </a:prstGeom>
+          <a:noFill/>
+          <a:ln/>
+        </p:spPr>
+        <p:txBody>
+          <a:bodyPr wrap="square" lIns="0" tIns="0" rIns="0" bIns="0" rtlCol="0" anchor="ctr"/>
+          <a:lstStyle/>
+          <a:p>
+            <a:pPr marL="0" indent="0" algn="ctr">
+              <a:buNone/>
+            </a:pPr>
+            <a:r>
+              <a:rPr lang="en-US" sz="1100" dirty="0">
+                <a:solidFill>
+                  <a:srgbClr val="CADCFC"/>
+                </a:solidFill>
+                <a:latin typeface="Calibri" pitchFamily="34" charset="0"/>
+                <a:ea typeface="Calibri" pitchFamily="34" charset="-122"/>
+                <a:cs typeface="Calibri" pitchFamily="34" charset="-120"/>
+              </a:rPr>
               <a:t>The subject *is* the clock: schedules open, drains race grace periods. The game mechanics are the product mechanics.</a:t>
             </a:r>
             <a:endParaRPr lang="en-US" sz="1100" dirty="0"/>
@@ -6860,7 +6997,7 @@
           <a:bodyPr wrap="square" lIns="0" tIns="0" rIns="0" bIns="0" rtlCol="0" anchor="ctr"/>
           <a:lstStyle/>
           <a:p>
-            <a:pPr algn="ctr" indent="0" marL="0">
+            <a:pPr marL="0" indent="0" algn="ctr">
               <a:buNone/>
             </a:pPr>
             <a:r>
@@ -6894,6 +7031,7 @@
         <a:solidFill>
           <a:srgbClr val="FFFFFF"/>
         </a:solidFill>
+        <a:effectLst/>
       </p:bgPr>
     </p:bg>
     <p:spTree>
@@ -6931,7 +7069,7 @@
           <a:bodyPr wrap="square" lIns="0" tIns="0" rIns="0" bIns="0" rtlCol="0" anchor="ctr"/>
           <a:lstStyle/>
           <a:p>
-            <a:pPr indent="0" marL="0">
+            <a:pPr marL="0" indent="0">
               <a:buNone/>
             </a:pPr>
             <a:r>
@@ -6970,24 +7108,31 @@
           </a:solidFill>
           <a:ln/>
           <a:effectLst>
-            <a:outerShdw sx="100000" sy="100000" kx="0" ky="0" algn="bl" rotWithShape="0" blurRad="76200" dist="25400" dir="2700000">
+            <a:outerShdw blurRad="76200" dist="25400" dir="2700000" algn="bl" rotWithShape="0">
               <a:srgbClr val="000000">
                 <a:alpha val="14000"/>
               </a:srgbClr>
             </a:outerShdw>
           </a:effectLst>
         </p:spPr>
+        <p:txBody>
+          <a:bodyPr/>
+          <a:lstStyle/>
+          <a:p>
+            <a:endParaRPr lang="en-US"/>
+          </a:p>
+        </p:txBody>
       </p:sp>
       <p:pic>
         <p:nvPicPr>
-          <p:cNvPr id="4" name="Image 0" descr="preencoded.png">    </p:cNvPr>
+          <p:cNvPr id="4" name="Image 0" descr="preencoded.png"/>
           <p:cNvPicPr>
             <a:picLocks noChangeAspect="1"/>
           </p:cNvPicPr>
           <p:nvPr/>
         </p:nvPicPr>
         <p:blipFill>
-          <a:blip r:embed="rId1"/>
+          <a:blip r:embed="rId3"/>
           <a:stretch>
             <a:fillRect/>
           </a:stretch>
@@ -7023,7 +7168,7 @@
           <a:bodyPr wrap="square" lIns="0" tIns="0" rIns="0" bIns="0" rtlCol="0" anchor="ctr"/>
           <a:lstStyle/>
           <a:p>
-            <a:pPr indent="0" marL="0">
+            <a:pPr marL="0" indent="0">
               <a:buNone/>
             </a:pPr>
             <a:r>
@@ -7147,24 +7292,31 @@
           </a:solidFill>
           <a:ln/>
           <a:effectLst>
-            <a:outerShdw sx="100000" sy="100000" kx="0" ky="0" algn="bl" rotWithShape="0" blurRad="76200" dist="25400" dir="2700000">
+            <a:outerShdw blurRad="76200" dist="25400" dir="2700000" algn="bl" rotWithShape="0">
               <a:srgbClr val="000000">
                 <a:alpha val="14000"/>
               </a:srgbClr>
             </a:outerShdw>
           </a:effectLst>
         </p:spPr>
+        <p:txBody>
+          <a:bodyPr/>
+          <a:lstStyle/>
+          <a:p>
+            <a:endParaRPr lang="en-US"/>
+          </a:p>
+        </p:txBody>
       </p:sp>
       <p:pic>
         <p:nvPicPr>
-          <p:cNvPr id="8" name="Image 1" descr="preencoded.png">    </p:cNvPr>
+          <p:cNvPr id="8" name="Image 1" descr="preencoded.png"/>
           <p:cNvPicPr>
             <a:picLocks noChangeAspect="1"/>
           </p:cNvPicPr>
           <p:nvPr/>
         </p:nvPicPr>
         <p:blipFill>
-          <a:blip r:embed="rId2"/>
+          <a:blip r:embed="rId4"/>
           <a:stretch>
             <a:fillRect/>
           </a:stretch>
@@ -7200,7 +7352,7 @@
           <a:bodyPr wrap="square" lIns="0" tIns="0" rIns="0" bIns="0" rtlCol="0" anchor="ctr"/>
           <a:lstStyle/>
           <a:p>
-            <a:pPr indent="0" marL="0">
+            <a:pPr marL="0" indent="0">
               <a:buNone/>
             </a:pPr>
             <a:r>
@@ -7324,7 +7476,7 @@
           <a:bodyPr wrap="square" lIns="0" tIns="0" rIns="0" bIns="0" rtlCol="0" anchor="ctr"/>
           <a:lstStyle/>
           <a:p>
-            <a:pPr algn="ctr" indent="0" marL="0">
+            <a:pPr marL="0" indent="0" algn="ctr">
               <a:buNone/>
             </a:pPr>
             <a:r>
@@ -7358,6 +7510,7 @@
         <a:solidFill>
           <a:srgbClr val="FFFFFF"/>
         </a:solidFill>
+        <a:effectLst/>
       </p:bgPr>
     </p:bg>
     <p:spTree>
@@ -7395,7 +7548,7 @@
           <a:bodyPr wrap="square" lIns="0" tIns="0" rIns="0" bIns="0" rtlCol="0" anchor="ctr"/>
           <a:lstStyle/>
           <a:p>
-            <a:pPr indent="0" marL="0">
+            <a:pPr marL="0" indent="0">
               <a:buNone/>
             </a:pPr>
             <a:r>
@@ -7434,13 +7587,20 @@
           </a:solidFill>
           <a:ln/>
           <a:effectLst>
-            <a:outerShdw sx="100000" sy="100000" kx="0" ky="0" algn="bl" rotWithShape="0" blurRad="76200" dist="25400" dir="2700000">
+            <a:outerShdw blurRad="76200" dist="25400" dir="2700000" algn="bl" rotWithShape="0">
               <a:srgbClr val="000000">
                 <a:alpha val="14000"/>
               </a:srgbClr>
             </a:outerShdw>
           </a:effectLst>
         </p:spPr>
+        <p:txBody>
+          <a:bodyPr/>
+          <a:lstStyle/>
+          <a:p>
+            <a:endParaRPr lang="en-US"/>
+          </a:p>
+        </p:txBody>
       </p:sp>
       <p:sp>
         <p:nvSpPr>
@@ -7461,390 +7621,17 @@
           </a:solidFill>
           <a:ln/>
         </p:spPr>
+        <p:txBody>
+          <a:bodyPr/>
+          <a:lstStyle/>
+          <a:p>
+            <a:endParaRPr lang="en-US"/>
+          </a:p>
+        </p:txBody>
       </p:sp>
       <p:pic>
         <p:nvPicPr>
-          <p:cNvPr id="5" name="Image 0" descr="preencoded.png">    </p:cNvPr>
-          <p:cNvPicPr>
-            <a:picLocks noChangeAspect="1"/>
-          </p:cNvPicPr>
-          <p:nvPr/>
-        </p:nvPicPr>
-        <p:blipFill>
-          <a:blip r:embed="rId1"/>
-          <a:stretch>
-            <a:fillRect/>
-          </a:stretch>
-        </p:blipFill>
-        <p:spPr>
-          <a:xfrm>
-            <a:off x="1618488" y="1426464"/>
-            <a:ext cx="329184" cy="329184"/>
-          </a:xfrm>
-          <a:prstGeom prst="rect">
-            <a:avLst/>
-          </a:prstGeom>
-        </p:spPr>
-      </p:pic>
-      <p:sp>
-        <p:nvSpPr>
-          <p:cNvPr id="6" name="Text 3"/>
-          <p:cNvSpPr/>
-          <p:nvPr/>
-        </p:nvSpPr>
-        <p:spPr>
-          <a:xfrm>
-            <a:off x="457200" y="1993392"/>
-            <a:ext cx="2651760" cy="384048"/>
-          </a:xfrm>
-          <a:prstGeom prst="rect">
-            <a:avLst/>
-          </a:prstGeom>
-          <a:noFill/>
-          <a:ln/>
-        </p:spPr>
-        <p:txBody>
-          <a:bodyPr wrap="square" lIns="0" tIns="0" rIns="0" bIns="0" rtlCol="0" anchor="ctr"/>
-          <a:lstStyle/>
-          <a:p>
-            <a:pPr algn="ctr" indent="0" marL="0">
-              <a:buNone/>
-            </a:pPr>
-            <a:r>
-              <a:rPr lang="en-US" sz="1550" b="1" dirty="0">
-                <a:solidFill>
-                  <a:srgbClr val="1E2761"/>
-                </a:solidFill>
-                <a:latin typeface="Cambria" pitchFamily="34" charset="0"/>
-                <a:ea typeface="Cambria" pitchFamily="34" charset="-122"/>
-                <a:cs typeface="Cambria" pitchFamily="34" charset="-120"/>
-              </a:rPr>
-              <a:t>Killercoda</a:t>
-            </a:r>
-            <a:endParaRPr lang="en-US" sz="1550" dirty="0"/>
-          </a:p>
-        </p:txBody>
-      </p:sp>
-      <p:sp>
-        <p:nvSpPr>
-          <p:cNvPr id="7" name="Text 4"/>
-          <p:cNvSpPr/>
-          <p:nvPr/>
-        </p:nvSpPr>
-        <p:spPr>
-          <a:xfrm>
-            <a:off x="640080" y="2395728"/>
-            <a:ext cx="2286000" cy="1051560"/>
-          </a:xfrm>
-          <a:prstGeom prst="rect">
-            <a:avLst/>
-          </a:prstGeom>
-          <a:noFill/>
-          <a:ln/>
-        </p:spPr>
-        <p:txBody>
-          <a:bodyPr wrap="square" lIns="0" tIns="0" rIns="0" bIns="0" rtlCol="0" anchor="ctr"/>
-          <a:lstStyle/>
-          <a:p>
-            <a:pPr algn="ctr" indent="0" marL="0">
-              <a:buNone/>
-            </a:pPr>
-            <a:r>
-              <a:rPr lang="en-US" sz="1080" dirty="0">
-                <a:solidFill>
-                  <a:srgbClr val="1A1F36"/>
-                </a:solidFill>
-                <a:latin typeface="Calibri" pitchFamily="34" charset="0"/>
-                <a:ea typeface="Calibri" pitchFamily="34" charset="-122"/>
-                <a:cs typeface="Calibri" pitchFamily="34" charset="-120"/>
-              </a:rPr>
-              <a:t>Browser, zero install. Pre-baked to control-plane Ready — you start at the fun part.</a:t>
-            </a:r>
-            <a:endParaRPr lang="en-US" sz="1080" dirty="0"/>
-          </a:p>
-        </p:txBody>
-      </p:sp>
-      <p:sp>
-        <p:nvSpPr>
-          <p:cNvPr id="8" name="Text 5"/>
-          <p:cNvSpPr/>
-          <p:nvPr/>
-        </p:nvSpPr>
-        <p:spPr>
-          <a:xfrm>
-            <a:off x="640080" y="3474720"/>
-            <a:ext cx="2286000" cy="411480"/>
-          </a:xfrm>
-          <a:prstGeom prst="rect">
-            <a:avLst/>
-          </a:prstGeom>
-          <a:noFill/>
-          <a:ln/>
-        </p:spPr>
-        <p:txBody>
-          <a:bodyPr wrap="square" lIns="0" tIns="0" rIns="0" bIns="0" rtlCol="0" anchor="ctr"/>
-          <a:lstStyle/>
-          <a:p>
-            <a:pPr algn="ctr" indent="0" marL="0">
-              <a:buNone/>
-            </a:pPr>
-            <a:r>
-              <a:rPr lang="en-US" sz="1000" i="1" dirty="0">
-                <a:solidFill>
-                  <a:srgbClr val="5B6478"/>
-                </a:solidFill>
-                <a:latin typeface="Calibri" pitchFamily="34" charset="0"/>
-                <a:ea typeface="Calibri" pitchFamily="34" charset="-122"/>
-                <a:cs typeface="Calibri" pitchFamily="34" charset="-120"/>
-              </a:rPr>
-              <a:t>Locked-down laptops · first-timers</a:t>
-            </a:r>
-            <a:endParaRPr lang="en-US" sz="1000" dirty="0"/>
-          </a:p>
-        </p:txBody>
-      </p:sp>
-      <p:sp>
-        <p:nvSpPr>
-          <p:cNvPr id="9" name="Shape 6"/>
-          <p:cNvSpPr/>
-          <p:nvPr/>
-        </p:nvSpPr>
-        <p:spPr>
-          <a:xfrm>
-            <a:off x="3319272" y="1097280"/>
-            <a:ext cx="2651760" cy="2880360"/>
-          </a:xfrm>
-          <a:prstGeom prst="roundRect">
-            <a:avLst>
-              <a:gd name="adj" fmla="val 3448"/>
-            </a:avLst>
-          </a:prstGeom>
-          <a:solidFill>
-            <a:srgbClr val="EFF4FE"/>
-          </a:solidFill>
-          <a:ln/>
-          <a:effectLst>
-            <a:outerShdw sx="100000" sy="100000" kx="0" ky="0" algn="bl" rotWithShape="0" blurRad="76200" dist="25400" dir="2700000">
-              <a:srgbClr val="000000">
-                <a:alpha val="14000"/>
-              </a:srgbClr>
-            </a:outerShdw>
-          </a:effectLst>
-        </p:spPr>
-      </p:sp>
-      <p:sp>
-        <p:nvSpPr>
-          <p:cNvPr id="10" name="Shape 7"/>
-          <p:cNvSpPr/>
-          <p:nvPr/>
-        </p:nvSpPr>
-        <p:spPr>
-          <a:xfrm>
-            <a:off x="4352544" y="1298448"/>
-            <a:ext cx="585216" cy="585216"/>
-          </a:xfrm>
-          <a:prstGeom prst="ellipse">
-            <a:avLst/>
-          </a:prstGeom>
-          <a:solidFill>
-            <a:srgbClr val="FFFFFF"/>
-          </a:solidFill>
-          <a:ln/>
-        </p:spPr>
-      </p:sp>
-      <p:pic>
-        <p:nvPicPr>
-          <p:cNvPr id="11" name="Image 1" descr="preencoded.png">    </p:cNvPr>
-          <p:cNvPicPr>
-            <a:picLocks noChangeAspect="1"/>
-          </p:cNvPicPr>
-          <p:nvPr/>
-        </p:nvPicPr>
-        <p:blipFill>
-          <a:blip r:embed="rId2"/>
-          <a:stretch>
-            <a:fillRect/>
-          </a:stretch>
-        </p:blipFill>
-        <p:spPr>
-          <a:xfrm>
-            <a:off x="4480560" y="1426464"/>
-            <a:ext cx="329184" cy="329184"/>
-          </a:xfrm>
-          <a:prstGeom prst="rect">
-            <a:avLst/>
-          </a:prstGeom>
-        </p:spPr>
-      </p:pic>
-      <p:sp>
-        <p:nvSpPr>
-          <p:cNvPr id="12" name="Text 8"/>
-          <p:cNvSpPr/>
-          <p:nvPr/>
-        </p:nvSpPr>
-        <p:spPr>
-          <a:xfrm>
-            <a:off x="3319272" y="1993392"/>
-            <a:ext cx="2651760" cy="384048"/>
-          </a:xfrm>
-          <a:prstGeom prst="rect">
-            <a:avLst/>
-          </a:prstGeom>
-          <a:noFill/>
-          <a:ln/>
-        </p:spPr>
-        <p:txBody>
-          <a:bodyPr wrap="square" lIns="0" tIns="0" rIns="0" bIns="0" rtlCol="0" anchor="ctr"/>
-          <a:lstStyle/>
-          <a:p>
-            <a:pPr algn="ctr" indent="0" marL="0">
-              <a:buNone/>
-            </a:pPr>
-            <a:r>
-              <a:rPr lang="en-US" sz="1550" b="1" dirty="0">
-                <a:solidFill>
-                  <a:srgbClr val="1E2761"/>
-                </a:solidFill>
-                <a:latin typeface="Cambria" pitchFamily="34" charset="0"/>
-                <a:ea typeface="Cambria" pitchFamily="34" charset="-122"/>
-                <a:cs typeface="Cambria" pitchFamily="34" charset="-120"/>
-              </a:rPr>
-              <a:t>Codespaces</a:t>
-            </a:r>
-            <a:endParaRPr lang="en-US" sz="1550" dirty="0"/>
-          </a:p>
-        </p:txBody>
-      </p:sp>
-      <p:sp>
-        <p:nvSpPr>
-          <p:cNvPr id="13" name="Text 9"/>
-          <p:cNvSpPr/>
-          <p:nvPr/>
-        </p:nvSpPr>
-        <p:spPr>
-          <a:xfrm>
-            <a:off x="3502152" y="2395728"/>
-            <a:ext cx="2286000" cy="1051560"/>
-          </a:xfrm>
-          <a:prstGeom prst="rect">
-            <a:avLst/>
-          </a:prstGeom>
-          <a:noFill/>
-          <a:ln/>
-        </p:spPr>
-        <p:txBody>
-          <a:bodyPr wrap="square" lIns="0" tIns="0" rIns="0" bIns="0" rtlCol="0" anchor="ctr"/>
-          <a:lstStyle/>
-          <a:p>
-            <a:pPr algn="ctr" indent="0" marL="0">
-              <a:buNone/>
-            </a:pPr>
-            <a:r>
-              <a:rPr lang="en-US" sz="1080" dirty="0">
-                <a:solidFill>
-                  <a:srgbClr val="1A1F36"/>
-                </a:solidFill>
-                <a:latin typeface="Calibri" pitchFamily="34" charset="0"/>
-                <a:ea typeface="Calibri" pitchFamily="34" charset="-122"/>
-                <a:cs typeface="Calibri" pitchFamily="34" charset="-120"/>
-              </a:rPr>
-              <a:t>Browser, full bootstrap. Devcontainer ships every tool, pinned. You run the bring-up.</a:t>
-            </a:r>
-            <a:endParaRPr lang="en-US" sz="1080" dirty="0"/>
-          </a:p>
-        </p:txBody>
-      </p:sp>
-      <p:sp>
-        <p:nvSpPr>
-          <p:cNvPr id="14" name="Text 10"/>
-          <p:cNvSpPr/>
-          <p:nvPr/>
-        </p:nvSpPr>
-        <p:spPr>
-          <a:xfrm>
-            <a:off x="3502152" y="3474720"/>
-            <a:ext cx="2286000" cy="411480"/>
-          </a:xfrm>
-          <a:prstGeom prst="rect">
-            <a:avLst/>
-          </a:prstGeom>
-          <a:noFill/>
-          <a:ln/>
-        </p:spPr>
-        <p:txBody>
-          <a:bodyPr wrap="square" lIns="0" tIns="0" rIns="0" bIns="0" rtlCol="0" anchor="ctr"/>
-          <a:lstStyle/>
-          <a:p>
-            <a:pPr algn="ctr" indent="0" marL="0">
-              <a:buNone/>
-            </a:pPr>
-            <a:r>
-              <a:rPr lang="en-US" sz="1000" i="1" dirty="0">
-                <a:solidFill>
-                  <a:srgbClr val="5B6478"/>
-                </a:solidFill>
-                <a:latin typeface="Calibri" pitchFamily="34" charset="0"/>
-                <a:ea typeface="Calibri" pitchFamily="34" charset="-122"/>
-                <a:cs typeface="Calibri" pitchFamily="34" charset="-120"/>
-              </a:rPr>
-              <a:t>Windows users · bootstrap muscle-memory</a:t>
-            </a:r>
-            <a:endParaRPr lang="en-US" sz="1000" dirty="0"/>
-          </a:p>
-        </p:txBody>
-      </p:sp>
-      <p:sp>
-        <p:nvSpPr>
-          <p:cNvPr id="15" name="Shape 11"/>
-          <p:cNvSpPr/>
-          <p:nvPr/>
-        </p:nvSpPr>
-        <p:spPr>
-          <a:xfrm>
-            <a:off x="6181344" y="1097280"/>
-            <a:ext cx="2651760" cy="2880360"/>
-          </a:xfrm>
-          <a:prstGeom prst="roundRect">
-            <a:avLst>
-              <a:gd name="adj" fmla="val 3448"/>
-            </a:avLst>
-          </a:prstGeom>
-          <a:solidFill>
-            <a:srgbClr val="EFF4FE"/>
-          </a:solidFill>
-          <a:ln/>
-          <a:effectLst>
-            <a:outerShdw sx="100000" sy="100000" kx="0" ky="0" algn="bl" rotWithShape="0" blurRad="76200" dist="25400" dir="2700000">
-              <a:srgbClr val="000000">
-                <a:alpha val="14000"/>
-              </a:srgbClr>
-            </a:outerShdw>
-          </a:effectLst>
-        </p:spPr>
-      </p:sp>
-      <p:sp>
-        <p:nvSpPr>
-          <p:cNvPr id="16" name="Shape 12"/>
-          <p:cNvSpPr/>
-          <p:nvPr/>
-        </p:nvSpPr>
-        <p:spPr>
-          <a:xfrm>
-            <a:off x="7214616" y="1298448"/>
-            <a:ext cx="585216" cy="585216"/>
-          </a:xfrm>
-          <a:prstGeom prst="ellipse">
-            <a:avLst/>
-          </a:prstGeom>
-          <a:solidFill>
-            <a:srgbClr val="FFFFFF"/>
-          </a:solidFill>
-          <a:ln/>
-        </p:spPr>
-      </p:sp>
-      <p:pic>
-        <p:nvPicPr>
-          <p:cNvPr id="17" name="Image 2" descr="preencoded.png">    </p:cNvPr>
+          <p:cNvPr id="5" name="Image 0" descr="preencoded.png"/>
           <p:cNvPicPr>
             <a:picLocks noChangeAspect="1"/>
           </p:cNvPicPr>
@@ -7858,7 +7645,7 @@
         </p:blipFill>
         <p:spPr>
           <a:xfrm>
-            <a:off x="7342632" y="1426464"/>
+            <a:off x="1618488" y="1426464"/>
             <a:ext cx="329184" cy="329184"/>
           </a:xfrm>
           <a:prstGeom prst="rect">
@@ -7868,13 +7655,13 @@
       </p:pic>
       <p:sp>
         <p:nvSpPr>
-          <p:cNvPr id="18" name="Text 13"/>
-          <p:cNvSpPr/>
-          <p:nvPr/>
-        </p:nvSpPr>
-        <p:spPr>
-          <a:xfrm>
-            <a:off x="6181344" y="1993392"/>
+          <p:cNvPr id="6" name="Text 3"/>
+          <p:cNvSpPr/>
+          <p:nvPr/>
+        </p:nvSpPr>
+        <p:spPr>
+          <a:xfrm>
+            <a:off x="457200" y="1993392"/>
             <a:ext cx="2651760" cy="384048"/>
           </a:xfrm>
           <a:prstGeom prst="rect">
@@ -7887,7 +7674,7 @@
           <a:bodyPr wrap="square" lIns="0" tIns="0" rIns="0" bIns="0" rtlCol="0" anchor="ctr"/>
           <a:lstStyle/>
           <a:p>
-            <a:pPr algn="ctr" indent="0" marL="0">
+            <a:pPr marL="0" indent="0" algn="ctr">
               <a:buNone/>
             </a:pPr>
             <a:r>
@@ -7899,7 +7686,7 @@
                 <a:ea typeface="Cambria" pitchFamily="34" charset="-122"/>
                 <a:cs typeface="Cambria" pitchFamily="34" charset="-120"/>
               </a:rPr>
-              <a:t>Local (kind / Hard)</a:t>
+              <a:t>Killercoda</a:t>
             </a:r>
             <a:endParaRPr lang="en-US" sz="1550" dirty="0"/>
           </a:p>
@@ -7907,13 +7694,13 @@
       </p:sp>
       <p:sp>
         <p:nvSpPr>
-          <p:cNvPr id="19" name="Text 14"/>
-          <p:cNvSpPr/>
-          <p:nvPr/>
-        </p:nvSpPr>
-        <p:spPr>
-          <a:xfrm>
-            <a:off x="6364224" y="2395728"/>
+          <p:cNvPr id="7" name="Text 4"/>
+          <p:cNvSpPr/>
+          <p:nvPr/>
+        </p:nvSpPr>
+        <p:spPr>
+          <a:xfrm>
+            <a:off x="640080" y="2395728"/>
             <a:ext cx="2286000" cy="1051560"/>
           </a:xfrm>
           <a:prstGeom prst="rect">
@@ -7926,7 +7713,7 @@
           <a:bodyPr wrap="square" lIns="0" tIns="0" rIns="0" bIns="0" rtlCol="0" anchor="ctr"/>
           <a:lstStyle/>
           <a:p>
-            <a:pPr algn="ctr" indent="0" marL="0">
+            <a:pPr marL="0" indent="0" algn="ctr">
               <a:buNone/>
             </a:pPr>
             <a:r>
@@ -7938,6 +7725,414 @@
                 <a:ea typeface="Calibri" pitchFamily="34" charset="-122"/>
                 <a:cs typeface="Calibri" pitchFamily="34" charset="-120"/>
               </a:rPr>
+              <a:t>Browser, zero install. Pre-baked to control-plane Ready — you start at the fun part.</a:t>
+            </a:r>
+            <a:endParaRPr lang="en-US" sz="1080" dirty="0"/>
+          </a:p>
+        </p:txBody>
+      </p:sp>
+      <p:sp>
+        <p:nvSpPr>
+          <p:cNvPr id="8" name="Text 5"/>
+          <p:cNvSpPr/>
+          <p:nvPr/>
+        </p:nvSpPr>
+        <p:spPr>
+          <a:xfrm>
+            <a:off x="640080" y="3474720"/>
+            <a:ext cx="2286000" cy="411480"/>
+          </a:xfrm>
+          <a:prstGeom prst="rect">
+            <a:avLst/>
+          </a:prstGeom>
+          <a:noFill/>
+          <a:ln/>
+        </p:spPr>
+        <p:txBody>
+          <a:bodyPr wrap="square" lIns="0" tIns="0" rIns="0" bIns="0" rtlCol="0" anchor="ctr"/>
+          <a:lstStyle/>
+          <a:p>
+            <a:pPr marL="0" indent="0" algn="ctr">
+              <a:buNone/>
+            </a:pPr>
+            <a:r>
+              <a:rPr lang="en-US" sz="1000" i="1" dirty="0">
+                <a:solidFill>
+                  <a:srgbClr val="5B6478"/>
+                </a:solidFill>
+                <a:latin typeface="Calibri" pitchFamily="34" charset="0"/>
+                <a:ea typeface="Calibri" pitchFamily="34" charset="-122"/>
+                <a:cs typeface="Calibri" pitchFamily="34" charset="-120"/>
+              </a:rPr>
+              <a:t>Locked-down laptops · first-timers</a:t>
+            </a:r>
+            <a:endParaRPr lang="en-US" sz="1000" dirty="0"/>
+          </a:p>
+        </p:txBody>
+      </p:sp>
+      <p:sp>
+        <p:nvSpPr>
+          <p:cNvPr id="9" name="Shape 6"/>
+          <p:cNvSpPr/>
+          <p:nvPr/>
+        </p:nvSpPr>
+        <p:spPr>
+          <a:xfrm>
+            <a:off x="3319272" y="1097280"/>
+            <a:ext cx="2651760" cy="2880360"/>
+          </a:xfrm>
+          <a:prstGeom prst="roundRect">
+            <a:avLst>
+              <a:gd name="adj" fmla="val 3448"/>
+            </a:avLst>
+          </a:prstGeom>
+          <a:solidFill>
+            <a:srgbClr val="EFF4FE"/>
+          </a:solidFill>
+          <a:ln/>
+          <a:effectLst>
+            <a:outerShdw blurRad="76200" dist="25400" dir="2700000" algn="bl" rotWithShape="0">
+              <a:srgbClr val="000000">
+                <a:alpha val="14000"/>
+              </a:srgbClr>
+            </a:outerShdw>
+          </a:effectLst>
+        </p:spPr>
+        <p:txBody>
+          <a:bodyPr/>
+          <a:lstStyle/>
+          <a:p>
+            <a:endParaRPr lang="en-US"/>
+          </a:p>
+        </p:txBody>
+      </p:sp>
+      <p:sp>
+        <p:nvSpPr>
+          <p:cNvPr id="10" name="Shape 7"/>
+          <p:cNvSpPr/>
+          <p:nvPr/>
+        </p:nvSpPr>
+        <p:spPr>
+          <a:xfrm>
+            <a:off x="4352544" y="1298448"/>
+            <a:ext cx="585216" cy="585216"/>
+          </a:xfrm>
+          <a:prstGeom prst="ellipse">
+            <a:avLst/>
+          </a:prstGeom>
+          <a:solidFill>
+            <a:srgbClr val="FFFFFF"/>
+          </a:solidFill>
+          <a:ln/>
+        </p:spPr>
+        <p:txBody>
+          <a:bodyPr/>
+          <a:lstStyle/>
+          <a:p>
+            <a:endParaRPr lang="en-US"/>
+          </a:p>
+        </p:txBody>
+      </p:sp>
+      <p:pic>
+        <p:nvPicPr>
+          <p:cNvPr id="11" name="Image 1" descr="preencoded.png"/>
+          <p:cNvPicPr>
+            <a:picLocks noChangeAspect="1"/>
+          </p:cNvPicPr>
+          <p:nvPr/>
+        </p:nvPicPr>
+        <p:blipFill>
+          <a:blip r:embed="rId4"/>
+          <a:stretch>
+            <a:fillRect/>
+          </a:stretch>
+        </p:blipFill>
+        <p:spPr>
+          <a:xfrm>
+            <a:off x="4480560" y="1426464"/>
+            <a:ext cx="329184" cy="329184"/>
+          </a:xfrm>
+          <a:prstGeom prst="rect">
+            <a:avLst/>
+          </a:prstGeom>
+        </p:spPr>
+      </p:pic>
+      <p:sp>
+        <p:nvSpPr>
+          <p:cNvPr id="12" name="Text 8"/>
+          <p:cNvSpPr/>
+          <p:nvPr/>
+        </p:nvSpPr>
+        <p:spPr>
+          <a:xfrm>
+            <a:off x="3319272" y="1993392"/>
+            <a:ext cx="2651760" cy="384048"/>
+          </a:xfrm>
+          <a:prstGeom prst="rect">
+            <a:avLst/>
+          </a:prstGeom>
+          <a:noFill/>
+          <a:ln/>
+        </p:spPr>
+        <p:txBody>
+          <a:bodyPr wrap="square" lIns="0" tIns="0" rIns="0" bIns="0" rtlCol="0" anchor="ctr"/>
+          <a:lstStyle/>
+          <a:p>
+            <a:pPr marL="0" indent="0" algn="ctr">
+              <a:buNone/>
+            </a:pPr>
+            <a:r>
+              <a:rPr lang="en-US" sz="1550" b="1" dirty="0">
+                <a:solidFill>
+                  <a:srgbClr val="1E2761"/>
+                </a:solidFill>
+                <a:latin typeface="Cambria" pitchFamily="34" charset="0"/>
+                <a:ea typeface="Cambria" pitchFamily="34" charset="-122"/>
+                <a:cs typeface="Cambria" pitchFamily="34" charset="-120"/>
+              </a:rPr>
+              <a:t>Codespaces</a:t>
+            </a:r>
+            <a:endParaRPr lang="en-US" sz="1550" dirty="0"/>
+          </a:p>
+        </p:txBody>
+      </p:sp>
+      <p:sp>
+        <p:nvSpPr>
+          <p:cNvPr id="13" name="Text 9"/>
+          <p:cNvSpPr/>
+          <p:nvPr/>
+        </p:nvSpPr>
+        <p:spPr>
+          <a:xfrm>
+            <a:off x="3502152" y="2395728"/>
+            <a:ext cx="2286000" cy="1051560"/>
+          </a:xfrm>
+          <a:prstGeom prst="rect">
+            <a:avLst/>
+          </a:prstGeom>
+          <a:noFill/>
+          <a:ln/>
+        </p:spPr>
+        <p:txBody>
+          <a:bodyPr wrap="square" lIns="0" tIns="0" rIns="0" bIns="0" rtlCol="0" anchor="ctr"/>
+          <a:lstStyle/>
+          <a:p>
+            <a:pPr marL="0" indent="0" algn="ctr">
+              <a:buNone/>
+            </a:pPr>
+            <a:r>
+              <a:rPr lang="en-US" sz="1080" dirty="0">
+                <a:solidFill>
+                  <a:srgbClr val="1A1F36"/>
+                </a:solidFill>
+                <a:latin typeface="Calibri" pitchFamily="34" charset="0"/>
+                <a:ea typeface="Calibri" pitchFamily="34" charset="-122"/>
+                <a:cs typeface="Calibri" pitchFamily="34" charset="-120"/>
+              </a:rPr>
+              <a:t>Browser, full bootstrap. Devcontainer ships every tool, pinned. You run the bring-up.</a:t>
+            </a:r>
+            <a:endParaRPr lang="en-US" sz="1080" dirty="0"/>
+          </a:p>
+        </p:txBody>
+      </p:sp>
+      <p:sp>
+        <p:nvSpPr>
+          <p:cNvPr id="14" name="Text 10"/>
+          <p:cNvSpPr/>
+          <p:nvPr/>
+        </p:nvSpPr>
+        <p:spPr>
+          <a:xfrm>
+            <a:off x="3502152" y="3474720"/>
+            <a:ext cx="2286000" cy="411480"/>
+          </a:xfrm>
+          <a:prstGeom prst="rect">
+            <a:avLst/>
+          </a:prstGeom>
+          <a:noFill/>
+          <a:ln/>
+        </p:spPr>
+        <p:txBody>
+          <a:bodyPr wrap="square" lIns="0" tIns="0" rIns="0" bIns="0" rtlCol="0" anchor="ctr"/>
+          <a:lstStyle/>
+          <a:p>
+            <a:pPr marL="0" indent="0" algn="ctr">
+              <a:buNone/>
+            </a:pPr>
+            <a:r>
+              <a:rPr lang="en-US" sz="1000" i="1" dirty="0">
+                <a:solidFill>
+                  <a:srgbClr val="5B6478"/>
+                </a:solidFill>
+                <a:latin typeface="Calibri" pitchFamily="34" charset="0"/>
+                <a:ea typeface="Calibri" pitchFamily="34" charset="-122"/>
+                <a:cs typeface="Calibri" pitchFamily="34" charset="-120"/>
+              </a:rPr>
+              <a:t>Windows users · bootstrap muscle-memory</a:t>
+            </a:r>
+            <a:endParaRPr lang="en-US" sz="1000" dirty="0"/>
+          </a:p>
+        </p:txBody>
+      </p:sp>
+      <p:sp>
+        <p:nvSpPr>
+          <p:cNvPr id="15" name="Shape 11"/>
+          <p:cNvSpPr/>
+          <p:nvPr/>
+        </p:nvSpPr>
+        <p:spPr>
+          <a:xfrm>
+            <a:off x="6181344" y="1097280"/>
+            <a:ext cx="2651760" cy="2880360"/>
+          </a:xfrm>
+          <a:prstGeom prst="roundRect">
+            <a:avLst>
+              <a:gd name="adj" fmla="val 3448"/>
+            </a:avLst>
+          </a:prstGeom>
+          <a:solidFill>
+            <a:srgbClr val="EFF4FE"/>
+          </a:solidFill>
+          <a:ln/>
+          <a:effectLst>
+            <a:outerShdw blurRad="76200" dist="25400" dir="2700000" algn="bl" rotWithShape="0">
+              <a:srgbClr val="000000">
+                <a:alpha val="14000"/>
+              </a:srgbClr>
+            </a:outerShdw>
+          </a:effectLst>
+        </p:spPr>
+        <p:txBody>
+          <a:bodyPr/>
+          <a:lstStyle/>
+          <a:p>
+            <a:endParaRPr lang="en-US"/>
+          </a:p>
+        </p:txBody>
+      </p:sp>
+      <p:sp>
+        <p:nvSpPr>
+          <p:cNvPr id="16" name="Shape 12"/>
+          <p:cNvSpPr/>
+          <p:nvPr/>
+        </p:nvSpPr>
+        <p:spPr>
+          <a:xfrm>
+            <a:off x="7214616" y="1298448"/>
+            <a:ext cx="585216" cy="585216"/>
+          </a:xfrm>
+          <a:prstGeom prst="ellipse">
+            <a:avLst/>
+          </a:prstGeom>
+          <a:solidFill>
+            <a:srgbClr val="FFFFFF"/>
+          </a:solidFill>
+          <a:ln/>
+        </p:spPr>
+        <p:txBody>
+          <a:bodyPr/>
+          <a:lstStyle/>
+          <a:p>
+            <a:endParaRPr lang="en-US"/>
+          </a:p>
+        </p:txBody>
+      </p:sp>
+      <p:pic>
+        <p:nvPicPr>
+          <p:cNvPr id="17" name="Image 2" descr="preencoded.png"/>
+          <p:cNvPicPr>
+            <a:picLocks noChangeAspect="1"/>
+          </p:cNvPicPr>
+          <p:nvPr/>
+        </p:nvPicPr>
+        <p:blipFill>
+          <a:blip r:embed="rId5"/>
+          <a:stretch>
+            <a:fillRect/>
+          </a:stretch>
+        </p:blipFill>
+        <p:spPr>
+          <a:xfrm>
+            <a:off x="7342632" y="1426464"/>
+            <a:ext cx="329184" cy="329184"/>
+          </a:xfrm>
+          <a:prstGeom prst="rect">
+            <a:avLst/>
+          </a:prstGeom>
+        </p:spPr>
+      </p:pic>
+      <p:sp>
+        <p:nvSpPr>
+          <p:cNvPr id="18" name="Text 13"/>
+          <p:cNvSpPr/>
+          <p:nvPr/>
+        </p:nvSpPr>
+        <p:spPr>
+          <a:xfrm>
+            <a:off x="6181344" y="1993392"/>
+            <a:ext cx="2651760" cy="384048"/>
+          </a:xfrm>
+          <a:prstGeom prst="rect">
+            <a:avLst/>
+          </a:prstGeom>
+          <a:noFill/>
+          <a:ln/>
+        </p:spPr>
+        <p:txBody>
+          <a:bodyPr wrap="square" lIns="0" tIns="0" rIns="0" bIns="0" rtlCol="0" anchor="ctr"/>
+          <a:lstStyle/>
+          <a:p>
+            <a:pPr marL="0" indent="0" algn="ctr">
+              <a:buNone/>
+            </a:pPr>
+            <a:r>
+              <a:rPr lang="en-US" sz="1550" b="1" dirty="0">
+                <a:solidFill>
+                  <a:srgbClr val="1E2761"/>
+                </a:solidFill>
+                <a:latin typeface="Cambria" pitchFamily="34" charset="0"/>
+                <a:ea typeface="Cambria" pitchFamily="34" charset="-122"/>
+                <a:cs typeface="Cambria" pitchFamily="34" charset="-120"/>
+              </a:rPr>
+              <a:t>Local (kind / Hard)</a:t>
+            </a:r>
+            <a:endParaRPr lang="en-US" sz="1550" dirty="0"/>
+          </a:p>
+        </p:txBody>
+      </p:sp>
+      <p:sp>
+        <p:nvSpPr>
+          <p:cNvPr id="19" name="Text 14"/>
+          <p:cNvSpPr/>
+          <p:nvPr/>
+        </p:nvSpPr>
+        <p:spPr>
+          <a:xfrm>
+            <a:off x="6364224" y="2395728"/>
+            <a:ext cx="2286000" cy="1051560"/>
+          </a:xfrm>
+          <a:prstGeom prst="rect">
+            <a:avLst/>
+          </a:prstGeom>
+          <a:noFill/>
+          <a:ln/>
+        </p:spPr>
+        <p:txBody>
+          <a:bodyPr wrap="square" lIns="0" tIns="0" rIns="0" bIns="0" rtlCol="0" anchor="ctr"/>
+          <a:lstStyle/>
+          <a:p>
+            <a:pPr marL="0" indent="0" algn="ctr">
+              <a:buNone/>
+            </a:pPr>
+            <a:r>
+              <a:rPr lang="en-US" sz="1080" dirty="0">
+                <a:solidFill>
+                  <a:srgbClr val="1A1F36"/>
+                </a:solidFill>
+                <a:latin typeface="Calibri" pitchFamily="34" charset="0"/>
+                <a:ea typeface="Calibri" pitchFamily="34" charset="-122"/>
+                <a:cs typeface="Calibri" pitchFamily="34" charset="-120"/>
+              </a:rPr>
               <a:t>Your machine. Mac: scripts/setup-mac.sh (Colima-first). Hard = production-faithful, NOT compiled-from-source.</a:t>
             </a:r>
             <a:endParaRPr lang="en-US" sz="1080" dirty="0"/>
@@ -7965,7 +8160,7 @@
           <a:bodyPr wrap="square" lIns="0" tIns="0" rIns="0" bIns="0" rtlCol="0" anchor="ctr"/>
           <a:lstStyle/>
           <a:p>
-            <a:pPr algn="ctr" indent="0" marL="0">
+            <a:pPr marL="0" indent="0" algn="ctr">
               <a:buNone/>
             </a:pPr>
             <a:r>
@@ -8004,6 +8199,13 @@
           </a:solidFill>
           <a:ln/>
         </p:spPr>
+        <p:txBody>
+          <a:bodyPr/>
+          <a:lstStyle/>
+          <a:p>
+            <a:endParaRPr lang="en-US"/>
+          </a:p>
+        </p:txBody>
       </p:sp>
       <p:sp>
         <p:nvSpPr>
@@ -8026,7 +8228,7 @@
           <a:bodyPr wrap="square" lIns="0" tIns="0" rIns="0" bIns="0" rtlCol="0" anchor="ctr"/>
           <a:lstStyle/>
           <a:p>
-            <a:pPr indent="0" marL="0">
+            <a:pPr marL="0" indent="0">
               <a:buNone/>
             </a:pPr>
             <a:r>
@@ -8040,9 +8242,6 @@
               </a:rPr>
               <a:t>One command, any tier:  </a:t>
             </a:r>
-            <a:pPr indent="0" marL="0">
-              <a:buNone/>
-            </a:pPr>
             <a:r>
               <a:rPr lang="en-US" sz="1250" b="1" dirty="0">
                 <a:solidFill>
@@ -8074,6 +8273,7 @@
         <a:solidFill>
           <a:srgbClr val="FFFFFF"/>
         </a:solidFill>
+        <a:effectLst/>
       </p:bgPr>
     </p:bg>
     <p:spTree>
@@ -8111,7 +8311,7 @@
           <a:bodyPr wrap="square" lIns="0" tIns="0" rIns="0" bIns="0" rtlCol="0" anchor="ctr"/>
           <a:lstStyle/>
           <a:p>
-            <a:pPr indent="0" marL="0">
+            <a:pPr marL="0" indent="0">
               <a:buNone/>
             </a:pPr>
             <a:r>
@@ -8150,6 +8350,13 @@
           </a:solidFill>
           <a:ln/>
         </p:spPr>
+        <p:txBody>
+          <a:bodyPr/>
+          <a:lstStyle/>
+          <a:p>
+            <a:endParaRPr lang="en-US"/>
+          </a:p>
+        </p:txBody>
       </p:sp>
       <p:sp>
         <p:nvSpPr>
@@ -8170,6 +8377,13 @@
           </a:solidFill>
           <a:ln/>
         </p:spPr>
+        <p:txBody>
+          <a:bodyPr/>
+          <a:lstStyle/>
+          <a:p>
+            <a:endParaRPr lang="en-US"/>
+          </a:p>
+        </p:txBody>
       </p:sp>
       <p:sp>
         <p:nvSpPr>
@@ -8192,7 +8406,7 @@
           <a:bodyPr wrap="square" lIns="0" tIns="0" rIns="0" bIns="0" rtlCol="0" anchor="ctr"/>
           <a:lstStyle/>
           <a:p>
-            <a:pPr algn="ctr" indent="0" marL="0">
+            <a:pPr marL="0" indent="0" algn="ctr">
               <a:buNone/>
             </a:pPr>
             <a:r>
@@ -8231,7 +8445,7 @@
           <a:bodyPr wrap="square" lIns="0" tIns="0" rIns="0" bIns="0" rtlCol="0" anchor="ctr"/>
           <a:lstStyle/>
           <a:p>
-            <a:pPr indent="0" marL="0">
+            <a:pPr marL="0" indent="0">
               <a:buNone/>
             </a:pPr>
             <a:r>
@@ -8245,9 +8459,6 @@
               </a:rPr>
               <a:t>Open the window   </a:t>
             </a:r>
-            <a:pPr indent="0" marL="0">
-              <a:buNone/>
-            </a:pPr>
             <a:r>
               <a:rPr lang="en-US" sz="1250" dirty="0">
                 <a:solidFill>
@@ -8284,6 +8495,13 @@
           </a:solidFill>
           <a:ln/>
         </p:spPr>
+        <p:txBody>
+          <a:bodyPr/>
+          <a:lstStyle/>
+          <a:p>
+            <a:endParaRPr lang="en-US"/>
+          </a:p>
+        </p:txBody>
       </p:sp>
       <p:sp>
         <p:nvSpPr>
@@ -8304,6 +8522,13 @@
           </a:solidFill>
           <a:ln/>
         </p:spPr>
+        <p:txBody>
+          <a:bodyPr/>
+          <a:lstStyle/>
+          <a:p>
+            <a:endParaRPr lang="en-US"/>
+          </a:p>
+        </p:txBody>
       </p:sp>
       <p:sp>
         <p:nvSpPr>
@@ -8326,7 +8551,7 @@
           <a:bodyPr wrap="square" lIns="0" tIns="0" rIns="0" bIns="0" rtlCol="0" anchor="ctr"/>
           <a:lstStyle/>
           <a:p>
-            <a:pPr algn="ctr" indent="0" marL="0">
+            <a:pPr marL="0" indent="0" algn="ctr">
               <a:buNone/>
             </a:pPr>
             <a:r>
@@ -8365,7 +8590,7 @@
           <a:bodyPr wrap="square" lIns="0" tIns="0" rIns="0" bIns="0" rtlCol="0" anchor="ctr"/>
           <a:lstStyle/>
           <a:p>
-            <a:pPr indent="0" marL="0">
+            <a:pPr marL="0" indent="0">
               <a:buNone/>
             </a:pPr>
             <a:r>
@@ -8379,9 +8604,6 @@
               </a:rPr>
               <a:t>Stay compliant   </a:t>
             </a:r>
-            <a:pPr indent="0" marL="0">
-              <a:buNone/>
-            </a:pPr>
             <a:r>
               <a:rPr lang="en-US" sz="1250" dirty="0">
                 <a:solidFill>
@@ -8418,6 +8640,13 @@
           </a:solidFill>
           <a:ln/>
         </p:spPr>
+        <p:txBody>
+          <a:bodyPr/>
+          <a:lstStyle/>
+          <a:p>
+            <a:endParaRPr lang="en-US"/>
+          </a:p>
+        </p:txBody>
       </p:sp>
       <p:sp>
         <p:nvSpPr>
@@ -8438,6 +8667,13 @@
           </a:solidFill>
           <a:ln/>
         </p:spPr>
+        <p:txBody>
+          <a:bodyPr/>
+          <a:lstStyle/>
+          <a:p>
+            <a:endParaRPr lang="en-US"/>
+          </a:p>
+        </p:txBody>
       </p:sp>
       <p:sp>
         <p:nvSpPr>
@@ -8460,7 +8696,7 @@
           <a:bodyPr wrap="square" lIns="0" tIns="0" rIns="0" bIns="0" rtlCol="0" anchor="ctr"/>
           <a:lstStyle/>
           <a:p>
-            <a:pPr algn="ctr" indent="0" marL="0">
+            <a:pPr marL="0" indent="0" algn="ctr">
               <a:buNone/>
             </a:pPr>
             <a:r>
@@ -8499,7 +8735,7 @@
           <a:bodyPr wrap="square" lIns="0" tIns="0" rIns="0" bIns="0" rtlCol="0" anchor="ctr"/>
           <a:lstStyle/>
           <a:p>
-            <a:pPr indent="0" marL="0">
+            <a:pPr marL="0" indent="0">
               <a:buNone/>
             </a:pPr>
             <a:r>
@@ -8513,9 +8749,6 @@
               </a:rPr>
               <a:t>Survive the drain   </a:t>
             </a:r>
-            <a:pPr indent="0" marL="0">
-              <a:buNone/>
-            </a:pPr>
             <a:r>
               <a:rPr lang="en-US" sz="1250" dirty="0">
                 <a:solidFill>
@@ -8552,6 +8785,13 @@
           </a:solidFill>
           <a:ln/>
         </p:spPr>
+        <p:txBody>
+          <a:bodyPr/>
+          <a:lstStyle/>
+          <a:p>
+            <a:endParaRPr lang="en-US"/>
+          </a:p>
+        </p:txBody>
       </p:sp>
       <p:sp>
         <p:nvSpPr>
@@ -8572,6 +8812,13 @@
           </a:solidFill>
           <a:ln/>
         </p:spPr>
+        <p:txBody>
+          <a:bodyPr/>
+          <a:lstStyle/>
+          <a:p>
+            <a:endParaRPr lang="en-US"/>
+          </a:p>
+        </p:txBody>
       </p:sp>
       <p:sp>
         <p:nvSpPr>
@@ -8594,7 +8841,7 @@
           <a:bodyPr wrap="square" lIns="0" tIns="0" rIns="0" bIns="0" rtlCol="0" anchor="ctr"/>
           <a:lstStyle/>
           <a:p>
-            <a:pPr algn="ctr" indent="0" marL="0">
+            <a:pPr marL="0" indent="0" algn="ctr">
               <a:buNone/>
             </a:pPr>
             <a:r>
@@ -8633,7 +8880,7 @@
           <a:bodyPr wrap="square" lIns="0" tIns="0" rIns="0" bIns="0" rtlCol="0" anchor="ctr"/>
           <a:lstStyle/>
           <a:p>
-            <a:pPr indent="0" marL="0">
+            <a:pPr marL="0" indent="0">
               <a:buNone/>
             </a:pPr>
             <a:r>
@@ -8647,9 +8894,6 @@
               </a:rPr>
               <a:t>GitOps with Flux   </a:t>
             </a:r>
-            <a:pPr indent="0" marL="0">
-              <a:buNone/>
-            </a:pPr>
             <a:r>
               <a:rPr lang="en-US" sz="1250" dirty="0">
                 <a:solidFill>
@@ -8686,6 +8930,13 @@
           </a:solidFill>
           <a:ln/>
         </p:spPr>
+        <p:txBody>
+          <a:bodyPr/>
+          <a:lstStyle/>
+          <a:p>
+            <a:endParaRPr lang="en-US"/>
+          </a:p>
+        </p:txBody>
       </p:sp>
       <p:sp>
         <p:nvSpPr>
@@ -8706,6 +8957,13 @@
           </a:solidFill>
           <a:ln/>
         </p:spPr>
+        <p:txBody>
+          <a:bodyPr/>
+          <a:lstStyle/>
+          <a:p>
+            <a:endParaRPr lang="en-US"/>
+          </a:p>
+        </p:txBody>
       </p:sp>
       <p:sp>
         <p:nvSpPr>
@@ -8728,7 +8986,7 @@
           <a:bodyPr wrap="square" lIns="0" tIns="0" rIns="0" bIns="0" rtlCol="0" anchor="ctr"/>
           <a:lstStyle/>
           <a:p>
-            <a:pPr algn="ctr" indent="0" marL="0">
+            <a:pPr marL="0" indent="0" algn="ctr">
               <a:buNone/>
             </a:pPr>
             <a:r>
@@ -8767,7 +9025,7 @@
           <a:bodyPr wrap="square" lIns="0" tIns="0" rIns="0" bIns="0" rtlCol="0" anchor="ctr"/>
           <a:lstStyle/>
           <a:p>
-            <a:pPr indent="0" marL="0">
+            <a:pPr marL="0" indent="0">
               <a:buNone/>
             </a:pPr>
             <a:r>
@@ -8781,9 +9039,6 @@
               </a:rPr>
               <a:t>Confidential Containers   </a:t>
             </a:r>
-            <a:pPr indent="0" marL="0">
-              <a:buNone/>
-            </a:pPr>
             <a:r>
               <a:rPr lang="en-US" sz="1250" dirty="0">
                 <a:solidFill>
@@ -8815,6 +9070,7 @@
         <a:solidFill>
           <a:srgbClr val="FFFFFF"/>
         </a:solidFill>
+        <a:effectLst/>
       </p:bgPr>
     </p:bg>
     <p:spTree>
@@ -8852,7 +9108,7 @@
           <a:bodyPr wrap="square" lIns="0" tIns="0" rIns="0" bIns="0" rtlCol="0" anchor="ctr"/>
           <a:lstStyle/>
           <a:p>
-            <a:pPr indent="0" marL="0">
+            <a:pPr marL="0" indent="0">
               <a:buNone/>
             </a:pPr>
             <a:r>
@@ -8891,7 +9147,7 @@
           <a:bodyPr wrap="square" lIns="0" tIns="0" rIns="0" bIns="0" rtlCol="0" anchor="ctr"/>
           <a:lstStyle/>
           <a:p>
-            <a:pPr indent="0" marL="0">
+            <a:pPr marL="0" indent="0">
               <a:buNone/>
             </a:pPr>
             <a:r>
@@ -8930,13 +9186,20 @@
           </a:solidFill>
           <a:ln/>
           <a:effectLst>
-            <a:outerShdw sx="100000" sy="100000" kx="0" ky="0" algn="bl" rotWithShape="0" blurRad="76200" dist="25400" dir="2700000">
+            <a:outerShdw blurRad="76200" dist="25400" dir="2700000" algn="bl" rotWithShape="0">
               <a:srgbClr val="000000">
                 <a:alpha val="14000"/>
               </a:srgbClr>
             </a:outerShdw>
           </a:effectLst>
         </p:spPr>
+        <p:txBody>
+          <a:bodyPr/>
+          <a:lstStyle/>
+          <a:p>
+            <a:endParaRPr lang="en-US"/>
+          </a:p>
+        </p:txBody>
       </p:sp>
       <p:sp>
         <p:nvSpPr>
@@ -8959,7 +9222,7 @@
           <a:bodyPr wrap="square" lIns="0" tIns="0" rIns="0" bIns="0" rtlCol="0" anchor="ctr"/>
           <a:lstStyle/>
           <a:p>
-            <a:pPr indent="0" marL="0">
+            <a:pPr marL="0" indent="0">
               <a:buNone/>
             </a:pPr>
             <a:r>
@@ -8998,13 +9261,20 @@
           </a:solidFill>
           <a:ln/>
           <a:effectLst>
-            <a:outerShdw sx="100000" sy="100000" kx="0" ky="0" algn="bl" rotWithShape="0" blurRad="76200" dist="25400" dir="2700000">
+            <a:outerShdw blurRad="76200" dist="25400" dir="2700000" algn="bl" rotWithShape="0">
               <a:srgbClr val="000000">
                 <a:alpha val="14000"/>
               </a:srgbClr>
             </a:outerShdw>
           </a:effectLst>
         </p:spPr>
+        <p:txBody>
+          <a:bodyPr/>
+          <a:lstStyle/>
+          <a:p>
+            <a:endParaRPr lang="en-US"/>
+          </a:p>
+        </p:txBody>
       </p:sp>
       <p:sp>
         <p:nvSpPr>
@@ -9027,7 +9297,7 @@
           <a:bodyPr wrap="square" lIns="0" tIns="0" rIns="0" bIns="0" rtlCol="0" anchor="ctr"/>
           <a:lstStyle/>
           <a:p>
-            <a:pPr indent="0" marL="0">
+            <a:pPr marL="0" indent="0">
               <a:buNone/>
             </a:pPr>
             <a:r>
@@ -9066,13 +9336,20 @@
           </a:solidFill>
           <a:ln/>
           <a:effectLst>
-            <a:outerShdw sx="100000" sy="100000" kx="0" ky="0" algn="bl" rotWithShape="0" blurRad="76200" dist="25400" dir="2700000">
+            <a:outerShdw blurRad="76200" dist="25400" dir="2700000" algn="bl" rotWithShape="0">
               <a:srgbClr val="000000">
                 <a:alpha val="14000"/>
               </a:srgbClr>
             </a:outerShdw>
           </a:effectLst>
         </p:spPr>
+        <p:txBody>
+          <a:bodyPr/>
+          <a:lstStyle/>
+          <a:p>
+            <a:endParaRPr lang="en-US"/>
+          </a:p>
+        </p:txBody>
       </p:sp>
       <p:sp>
         <p:nvSpPr>
@@ -9095,7 +9372,7 @@
           <a:bodyPr wrap="square" lIns="0" tIns="0" rIns="0" bIns="0" rtlCol="0" anchor="ctr"/>
           <a:lstStyle/>
           <a:p>
-            <a:pPr indent="0" marL="0">
+            <a:pPr marL="0" indent="0">
               <a:buNone/>
             </a:pPr>
             <a:r>
@@ -9134,6 +9411,13 @@
           </a:solidFill>
           <a:ln/>
         </p:spPr>
+        <p:txBody>
+          <a:bodyPr/>
+          <a:lstStyle/>
+          <a:p>
+            <a:endParaRPr lang="en-US"/>
+          </a:p>
+        </p:txBody>
       </p:sp>
       <p:sp>
         <p:nvSpPr>
@@ -9156,7 +9440,7 @@
           <a:bodyPr wrap="square" lIns="0" tIns="0" rIns="0" bIns="0" rtlCol="0" anchor="ctr"/>
           <a:lstStyle/>
           <a:p>
-            <a:pPr indent="0" marL="0">
+            <a:pPr marL="0" indent="0">
               <a:buNone/>
             </a:pPr>
             <a:r>
@@ -9170,9 +9454,6 @@
               </a:rPr>
               <a:t>What you're proving:  </a:t>
             </a:r>
-            <a:pPr indent="0" marL="0">
-              <a:buNone/>
-            </a:pPr>
             <a:r>
               <a:rPr lang="en-US" sz="1300" dirty="0">
                 <a:solidFill>
@@ -9489,4 +9770,319 @@
     </a:ext>
   </a:extLst>
 </a:theme>
+</file>
+
+<file path=ppt/theme/theme2.xml><?xml version="1.0" encoding="utf-8"?>
+<a:theme xmlns:a="http://schemas.openxmlformats.org/drawingml/2006/main" name="Office Theme">
+  <a:themeElements>
+    <a:clrScheme name="Office">
+      <a:dk1>
+        <a:sysClr val="windowText" lastClr="000000"/>
+      </a:dk1>
+      <a:lt1>
+        <a:sysClr val="window" lastClr="FFFFFF"/>
+      </a:lt1>
+      <a:dk2>
+        <a:srgbClr val="0E2841"/>
+      </a:dk2>
+      <a:lt2>
+        <a:srgbClr val="E8E8E8"/>
+      </a:lt2>
+      <a:accent1>
+        <a:srgbClr val="156082"/>
+      </a:accent1>
+      <a:accent2>
+        <a:srgbClr val="E97132"/>
+      </a:accent2>
+      <a:accent3>
+        <a:srgbClr val="196B24"/>
+      </a:accent3>
+      <a:accent4>
+        <a:srgbClr val="0F9ED5"/>
+      </a:accent4>
+      <a:accent5>
+        <a:srgbClr val="A02B93"/>
+      </a:accent5>
+      <a:accent6>
+        <a:srgbClr val="4EA72E"/>
+      </a:accent6>
+      <a:hlink>
+        <a:srgbClr val="467886"/>
+      </a:hlink>
+      <a:folHlink>
+        <a:srgbClr val="96607D"/>
+      </a:folHlink>
+    </a:clrScheme>
+    <a:fontScheme name="Office">
+      <a:majorFont>
+        <a:latin typeface="Aptos Display" panose="02110004020202020204"/>
+        <a:ea typeface=""/>
+        <a:cs typeface=""/>
+        <a:font script="Jpan" typeface="游ゴシック Light"/>
+        <a:font script="Hang" typeface="맑은 고딕"/>
+        <a:font script="Hans" typeface="等线 Light"/>
+        <a:font script="Hant" typeface="新細明體"/>
+        <a:font script="Arab" typeface="Times New Roman"/>
+        <a:font script="Hebr" typeface="Times New Roman"/>
+        <a:font script="Thai" typeface="Angsana New"/>
+        <a:font script="Ethi" typeface="Nyala"/>
+        <a:font script="Beng" typeface="Vrinda"/>
+        <a:font script="Gujr" typeface="Shruti"/>
+        <a:font script="Khmr" typeface="MoolBoran"/>
+        <a:font script="Knda" typeface="Tunga"/>
+        <a:font script="Guru" typeface="Raavi"/>
+        <a:font script="Cans" typeface="Euphemia"/>
+        <a:font script="Cher" typeface="Plantagenet Cherokee"/>
+        <a:font script="Yiii" typeface="Microsoft Yi Baiti"/>
+        <a:font script="Tibt" typeface="Microsoft Himalaya"/>
+        <a:font script="Thaa" typeface="MV Boli"/>
+        <a:font script="Deva" typeface="Mangal"/>
+        <a:font script="Telu" typeface="Gautami"/>
+        <a:font script="Taml" typeface="Latha"/>
+        <a:font script="Syrc" typeface="Estrangelo Edessa"/>
+        <a:font script="Orya" typeface="Kalinga"/>
+        <a:font script="Mlym" typeface="Kartika"/>
+        <a:font script="Laoo" typeface="DokChampa"/>
+        <a:font script="Sinh" typeface="Iskoola Pota"/>
+        <a:font script="Mong" typeface="Mongolian Baiti"/>
+        <a:font script="Viet" typeface="Times New Roman"/>
+        <a:font script="Uigh" typeface="Microsoft Uighur"/>
+        <a:font script="Geor" typeface="Sylfaen"/>
+        <a:font script="Armn" typeface="Arial"/>
+        <a:font script="Bugi" typeface="Leelawadee UI"/>
+        <a:font script="Bopo" typeface="Microsoft JhengHei"/>
+        <a:font script="Java" typeface="Javanese Text"/>
+        <a:font script="Lisu" typeface="Segoe UI"/>
+        <a:font script="Mymr" typeface="Myanmar Text"/>
+        <a:font script="Nkoo" typeface="Ebrima"/>
+        <a:font script="Olck" typeface="Nirmala UI"/>
+        <a:font script="Osma" typeface="Ebrima"/>
+        <a:font script="Phag" typeface="Phagspa"/>
+        <a:font script="Syrn" typeface="Estrangelo Edessa"/>
+        <a:font script="Syrj" typeface="Estrangelo Edessa"/>
+        <a:font script="Syre" typeface="Estrangelo Edessa"/>
+        <a:font script="Sora" typeface="Nirmala UI"/>
+        <a:font script="Tale" typeface="Microsoft Tai Le"/>
+        <a:font script="Talu" typeface="Microsoft New Tai Lue"/>
+        <a:font script="Tfng" typeface="Ebrima"/>
+      </a:majorFont>
+      <a:minorFont>
+        <a:latin typeface="Aptos" panose="02110004020202020204"/>
+        <a:ea typeface=""/>
+        <a:cs typeface=""/>
+        <a:font script="Jpan" typeface="游ゴシック"/>
+        <a:font script="Hang" typeface="맑은 고딕"/>
+        <a:font script="Hans" typeface="等线"/>
+        <a:font script="Hant" typeface="新細明體"/>
+        <a:font script="Arab" typeface="Arial"/>
+        <a:font script="Hebr" typeface="Arial"/>
+        <a:font script="Thai" typeface="Cordia New"/>
+        <a:font script="Ethi" typeface="Nyala"/>
+        <a:font script="Beng" typeface="Vrinda"/>
+        <a:font script="Gujr" typeface="Shruti"/>
+        <a:font script="Khmr" typeface="DaunPenh"/>
+        <a:font script="Knda" typeface="Tunga"/>
+        <a:font script="Guru" typeface="Raavi"/>
+        <a:font script="Cans" typeface="Euphemia"/>
+        <a:font script="Cher" typeface="Plantagenet Cherokee"/>
+        <a:font script="Yiii" typeface="Microsoft Yi Baiti"/>
+        <a:font script="Tibt" typeface="Microsoft Himalaya"/>
+        <a:font script="Thaa" typeface="MV Boli"/>
+        <a:font script="Deva" typeface="Mangal"/>
+        <a:font script="Telu" typeface="Gautami"/>
+        <a:font script="Taml" typeface="Latha"/>
+        <a:font script="Syrc" typeface="Estrangelo Edessa"/>
+        <a:font script="Orya" typeface="Kalinga"/>
+        <a:font script="Mlym" typeface="Kartika"/>
+        <a:font script="Laoo" typeface="DokChampa"/>
+        <a:font script="Sinh" typeface="Iskoola Pota"/>
+        <a:font script="Mong" typeface="Mongolian Baiti"/>
+        <a:font script="Viet" typeface="Arial"/>
+        <a:font script="Uigh" typeface="Microsoft Uighur"/>
+        <a:font script="Geor" typeface="Sylfaen"/>
+        <a:font script="Armn" typeface="Arial"/>
+        <a:font script="Bugi" typeface="Leelawadee UI"/>
+        <a:font script="Bopo" typeface="Microsoft JhengHei"/>
+        <a:font script="Java" typeface="Javanese Text"/>
+        <a:font script="Lisu" typeface="Segoe UI"/>
+        <a:font script="Mymr" typeface="Myanmar Text"/>
+        <a:font script="Nkoo" typeface="Ebrima"/>
+        <a:font script="Olck" typeface="Nirmala UI"/>
+        <a:font script="Osma" typeface="Ebrima"/>
+        <a:font script="Phag" typeface="Phagspa"/>
+        <a:font script="Syrn" typeface="Estrangelo Edessa"/>
+        <a:font script="Syrj" typeface="Estrangelo Edessa"/>
+        <a:font script="Syre" typeface="Estrangelo Edessa"/>
+        <a:font script="Sora" typeface="Nirmala UI"/>
+        <a:font script="Tale" typeface="Microsoft Tai Le"/>
+        <a:font script="Talu" typeface="Microsoft New Tai Lue"/>
+        <a:font script="Tfng" typeface="Ebrima"/>
+      </a:minorFont>
+    </a:fontScheme>
+    <a:fmtScheme name="Office">
+      <a:fillStyleLst>
+        <a:solidFill>
+          <a:schemeClr val="phClr"/>
+        </a:solidFill>
+        <a:gradFill rotWithShape="1">
+          <a:gsLst>
+            <a:gs pos="0">
+              <a:schemeClr val="phClr">
+                <a:lumMod val="110000"/>
+                <a:satMod val="105000"/>
+                <a:tint val="67000"/>
+              </a:schemeClr>
+            </a:gs>
+            <a:gs pos="50000">
+              <a:schemeClr val="phClr">
+                <a:lumMod val="105000"/>
+                <a:satMod val="103000"/>
+                <a:tint val="73000"/>
+              </a:schemeClr>
+            </a:gs>
+            <a:gs pos="100000">
+              <a:schemeClr val="phClr">
+                <a:lumMod val="105000"/>
+                <a:satMod val="109000"/>
+                <a:tint val="81000"/>
+              </a:schemeClr>
+            </a:gs>
+          </a:gsLst>
+          <a:lin ang="5400000" scaled="0"/>
+        </a:gradFill>
+        <a:gradFill rotWithShape="1">
+          <a:gsLst>
+            <a:gs pos="0">
+              <a:schemeClr val="phClr">
+                <a:satMod val="103000"/>
+                <a:lumMod val="102000"/>
+                <a:tint val="94000"/>
+              </a:schemeClr>
+            </a:gs>
+            <a:gs pos="50000">
+              <a:schemeClr val="phClr">
+                <a:satMod val="110000"/>
+                <a:lumMod val="100000"/>
+                <a:shade val="100000"/>
+              </a:schemeClr>
+            </a:gs>
+            <a:gs pos="100000">
+              <a:schemeClr val="phClr">
+                <a:lumMod val="99000"/>
+                <a:satMod val="120000"/>
+                <a:shade val="78000"/>
+              </a:schemeClr>
+            </a:gs>
+          </a:gsLst>
+          <a:lin ang="5400000" scaled="0"/>
+        </a:gradFill>
+      </a:fillStyleLst>
+      <a:lnStyleLst>
+        <a:ln w="12700" cap="flat" cmpd="sng" algn="ctr">
+          <a:solidFill>
+            <a:schemeClr val="phClr"/>
+          </a:solidFill>
+          <a:prstDash val="solid"/>
+          <a:miter lim="800000"/>
+        </a:ln>
+        <a:ln w="19050" cap="flat" cmpd="sng" algn="ctr">
+          <a:solidFill>
+            <a:schemeClr val="phClr"/>
+          </a:solidFill>
+          <a:prstDash val="solid"/>
+          <a:miter lim="800000"/>
+        </a:ln>
+        <a:ln w="25400" cap="flat" cmpd="sng" algn="ctr">
+          <a:solidFill>
+            <a:schemeClr val="phClr"/>
+          </a:solidFill>
+          <a:prstDash val="solid"/>
+          <a:miter lim="800000"/>
+        </a:ln>
+      </a:lnStyleLst>
+      <a:effectStyleLst>
+        <a:effectStyle>
+          <a:effectLst/>
+        </a:effectStyle>
+        <a:effectStyle>
+          <a:effectLst/>
+        </a:effectStyle>
+        <a:effectStyle>
+          <a:effectLst>
+            <a:outerShdw blurRad="57150" dist="19050" dir="5400000" algn="ctr" rotWithShape="0">
+              <a:srgbClr val="000000">
+                <a:alpha val="63000"/>
+              </a:srgbClr>
+            </a:outerShdw>
+          </a:effectLst>
+        </a:effectStyle>
+      </a:effectStyleLst>
+      <a:bgFillStyleLst>
+        <a:solidFill>
+          <a:schemeClr val="phClr"/>
+        </a:solidFill>
+        <a:solidFill>
+          <a:schemeClr val="phClr">
+            <a:tint val="95000"/>
+            <a:satMod val="170000"/>
+          </a:schemeClr>
+        </a:solidFill>
+        <a:gradFill rotWithShape="1">
+          <a:gsLst>
+            <a:gs pos="0">
+              <a:schemeClr val="phClr">
+                <a:tint val="93000"/>
+                <a:satMod val="150000"/>
+                <a:shade val="98000"/>
+                <a:lumMod val="102000"/>
+              </a:schemeClr>
+            </a:gs>
+            <a:gs pos="50000">
+              <a:schemeClr val="phClr">
+                <a:tint val="98000"/>
+                <a:satMod val="130000"/>
+                <a:shade val="90000"/>
+                <a:lumMod val="103000"/>
+              </a:schemeClr>
+            </a:gs>
+            <a:gs pos="100000">
+              <a:schemeClr val="phClr">
+                <a:shade val="63000"/>
+                <a:satMod val="120000"/>
+              </a:schemeClr>
+            </a:gs>
+          </a:gsLst>
+          <a:lin ang="5400000" scaled="0"/>
+        </a:gradFill>
+      </a:bgFillStyleLst>
+    </a:fmtScheme>
+  </a:themeElements>
+  <a:objectDefaults>
+    <a:lnDef>
+      <a:spPr/>
+      <a:bodyPr/>
+      <a:lstStyle/>
+      <a:style>
+        <a:lnRef idx="2">
+          <a:schemeClr val="accent1"/>
+        </a:lnRef>
+        <a:fillRef idx="0">
+          <a:schemeClr val="accent1"/>
+        </a:fillRef>
+        <a:effectRef idx="1">
+          <a:schemeClr val="accent1"/>
+        </a:effectRef>
+        <a:fontRef idx="minor">
+          <a:schemeClr val="tx1"/>
+        </a:fontRef>
+      </a:style>
+    </a:lnDef>
+  </a:objectDefaults>
+  <a:extraClrSchemeLst/>
+  <a:extLst>
+    <a:ext uri="{05A4C25C-085E-4340-85A3-A5531E510DB2}">
+      <thm15:themeFamily xmlns:thm15="http://schemas.microsoft.com/office/thememl/2012/main" name="Office Theme" id="{2E142A2C-CD16-42D6-873A-C26D2A0506FA}" vid="{1BDDFF52-6CD6-40A5-AB3C-68EB2F1E4D0A}"/>
+    </a:ext>
+  </a:extLst>
+</a:theme>
 </file>